--- a/output/ai-trends-en/report.pptx
+++ b/output/ai-trends-en/report.pptx
@@ -15,7 +15,6 @@
     <p:sldId id="263" r:id="rId15"/>
     <p:sldId id="264" r:id="rId16"/>
     <p:sldId id="265" r:id="rId17"/>
-    <p:sldId id="266" r:id="rId18"/>
   </p:sldIdLst>
   <p:sldSz cx="12191695" cy="6858000" type="screen4x3"/>
   <p:notesSz cx="6858000" cy="9144000"/>
@@ -3441,14 +3440,6 @@
 <file path=ppt/slides/slide1.xml><?xml version="1.0" encoding="utf-8"?>
 <p:sld xmlns:a="http://schemas.openxmlformats.org/drawingml/2006/main" xmlns:p="http://schemas.openxmlformats.org/presentationml/2006/main" xmlns:r="http://schemas.openxmlformats.org/officeDocument/2006/relationships">
   <p:cSld>
-    <p:bg>
-      <p:bgPr>
-        <a:solidFill>
-          <a:srgbClr val="FAFAFC"/>
-        </a:solidFill>
-        <a:effectLst/>
-      </p:bgPr>
-    </p:bg>
     <p:spTree>
       <p:nvGrpSpPr>
         <p:cNvPr id="1" name=""/>
@@ -3470,7 +3461,15 @@
         <p:txBody>
           <a:bodyPr/>
           <a:lstStyle/>
-          <a:p/>
+          <a:p>
+            <a:r>
+              <a:rPr>
+                <a:ea typeface="Apple SD Gothic Neo"/>
+                <a:latin typeface="Apple SD Gothic Neo"/>
+              </a:rPr>
+              <a:t>AI Trends 2025-2026: The Age of Agentic AI</a:t>
+            </a:r>
+          </a:p>
         </p:txBody>
       </p:sp>
       <p:sp>
@@ -3487,39 +3486,14 @@
         <p:txBody>
           <a:bodyPr/>
           <a:lstStyle/>
-          <a:p/>
-        </p:txBody>
-      </p:sp>
-      <p:sp>
-        <p:nvSpPr>
-          <p:cNvPr id="4" name="TextBox 3"/>
-          <p:cNvSpPr txBox="1"/>
-          <p:nvPr/>
-        </p:nvSpPr>
-        <p:spPr>
-          <a:xfrm>
-            <a:off x="914400" y="1828800"/>
-            <a:ext cx="10058400" cy="1371600"/>
-          </a:xfrm>
-          <a:prstGeom prst="rect">
-            <a:avLst/>
-          </a:prstGeom>
-          <a:noFill/>
-        </p:spPr>
-        <p:txBody>
-          <a:bodyPr wrap="square">
-            <a:spAutoFit/>
-          </a:bodyPr>
-          <a:lstStyle/>
-          <a:p>
-            <a:pPr algn="ctr">
-              <a:defRPr sz="4000" b="1">
-                <a:solidFill>
-                  <a:srgbClr val="1A1A2E"/>
-                </a:solidFill>
-                <a:latin typeface="Apple SD Gothic Neo"/>
-              </a:defRPr>
-            </a:pPr>
+          <a:p>
+            <a:r>
+              <a:rPr>
+                <a:ea typeface="Apple SD Gothic Neo"/>
+                <a:latin typeface="Apple SD Gothic Neo"/>
+              </a:rPr>
+              <a:t>IT Team Knowledge Sharing | March 2026</a:t>
+            </a:r>
           </a:p>
         </p:txBody>
       </p:sp>
@@ -3534,14 +3508,6 @@
 <file path=ppt/slides/slide10.xml><?xml version="1.0" encoding="utf-8"?>
 <p:sld xmlns:a="http://schemas.openxmlformats.org/drawingml/2006/main" xmlns:p="http://schemas.openxmlformats.org/presentationml/2006/main" xmlns:r="http://schemas.openxmlformats.org/officeDocument/2006/relationships">
   <p:cSld>
-    <p:bg>
-      <p:bgPr>
-        <a:solidFill>
-          <a:srgbClr val="FAFAFC"/>
-        </a:solidFill>
-        <a:effectLst/>
-      </p:bgPr>
-    </p:bg>
     <p:spTree>
       <p:nvGrpSpPr>
         <p:cNvPr id="1" name=""/>
@@ -3551,72 +3517,6 @@
       <p:grpSpPr/>
       <p:sp>
         <p:nvSpPr>
-          <p:cNvPr id="2" name="TextBox 1"/>
-          <p:cNvSpPr txBox="1"/>
-          <p:nvPr/>
-        </p:nvSpPr>
-        <p:spPr>
-          <a:xfrm>
-            <a:off x="914400" y="1828800"/>
-            <a:ext cx="10058400" cy="1828800"/>
-          </a:xfrm>
-          <a:prstGeom prst="rect">
-            <a:avLst/>
-          </a:prstGeom>
-          <a:noFill/>
-        </p:spPr>
-        <p:txBody>
-          <a:bodyPr wrap="square">
-            <a:spAutoFit/>
-          </a:bodyPr>
-          <a:lstStyle/>
-          <a:p>
-            <a:pPr algn="ctr">
-              <a:defRPr sz="3600" b="1">
-                <a:solidFill>
-                  <a:srgbClr val="1A1A2E"/>
-                </a:solidFill>
-                <a:latin typeface="Apple SD Gothic Neo"/>
-              </a:defRPr>
-            </a:pPr>
-            <a:r>
-              <a:rPr>
-                <a:ea typeface="Apple SD Gothic Neo"/>
-                <a:latin typeface="Apple SD Gothic Neo"/>
-              </a:rPr>
-              <a:t>Conclusion: What We Can Do Right Now</a:t>
-            </a:r>
-          </a:p>
-        </p:txBody>
-      </p:sp>
-    </p:spTree>
-  </p:cSld>
-  <p:clrMapOvr>
-    <a:masterClrMapping/>
-  </p:clrMapOvr>
-</p:sld>
-</file>
-
-<file path=ppt/slides/slide11.xml><?xml version="1.0" encoding="utf-8"?>
-<p:sld xmlns:a="http://schemas.openxmlformats.org/drawingml/2006/main" xmlns:p="http://schemas.openxmlformats.org/presentationml/2006/main" xmlns:r="http://schemas.openxmlformats.org/officeDocument/2006/relationships">
-  <p:cSld>
-    <p:bg>
-      <p:bgPr>
-        <a:solidFill>
-          <a:srgbClr val="FAFAFC"/>
-        </a:solidFill>
-        <a:effectLst/>
-      </p:bgPr>
-    </p:bg>
-    <p:spTree>
-      <p:nvGrpSpPr>
-        <p:cNvPr id="1" name=""/>
-        <p:cNvGrpSpPr/>
-        <p:nvPr/>
-      </p:nvGrpSpPr>
-      <p:grpSpPr/>
-      <p:sp>
-        <p:nvSpPr>
           <p:cNvPr id="2" name="Title 1"/>
           <p:cNvSpPr>
             <a:spLocks noGrp="1"/>
@@ -3629,7 +3529,15 @@
         <p:txBody>
           <a:bodyPr/>
           <a:lstStyle/>
-          <a:p/>
+          <a:p>
+            <a:r>
+              <a:rPr>
+                <a:ea typeface="Apple SD Gothic Neo"/>
+                <a:latin typeface="Apple SD Gothic Neo"/>
+              </a:rPr>
+              <a:t>요약</a:t>
+            </a:r>
+          </a:p>
         </p:txBody>
       </p:sp>
       <p:sp>
@@ -3646,248 +3554,116 @@
         <p:txBody>
           <a:bodyPr/>
           <a:lstStyle/>
-          <a:p/>
-        </p:txBody>
-      </p:sp>
-      <p:sp>
-        <p:nvSpPr>
-          <p:cNvPr id="4" name="TextBox 3"/>
-          <p:cNvSpPr txBox="1"/>
-          <p:nvPr/>
-        </p:nvSpPr>
-        <p:spPr>
-          <a:xfrm>
-            <a:off x="457200" y="274320"/>
-            <a:ext cx="10972800" cy="731520"/>
-          </a:xfrm>
-          <a:prstGeom prst="rect">
-            <a:avLst/>
-          </a:prstGeom>
-          <a:noFill/>
-        </p:spPr>
-        <p:txBody>
-          <a:bodyPr wrap="square">
-            <a:spAutoFit/>
-          </a:bodyPr>
-          <a:lstStyle/>
-          <a:p>
-            <a:pPr algn="l">
-              <a:defRPr sz="2800" b="1">
-                <a:solidFill>
-                  <a:srgbClr val="1A1A2E"/>
-                </a:solidFill>
-                <a:latin typeface="Apple SD Gothic Neo"/>
-              </a:defRPr>
-            </a:pPr>
-            <a:r>
-              <a:rPr>
-                <a:ea typeface="Apple SD Gothic Neo"/>
-                <a:latin typeface="Apple SD Gothic Neo"/>
-              </a:rPr>
-              <a:t>요약</a:t>
-            </a:r>
-          </a:p>
-        </p:txBody>
-      </p:sp>
-      <p:sp>
-        <p:nvSpPr>
-          <p:cNvPr id="5" name="TextBox 4"/>
-          <p:cNvSpPr txBox="1"/>
-          <p:nvPr/>
-        </p:nvSpPr>
-        <p:spPr>
-          <a:xfrm>
-            <a:off x="731520" y="1371600"/>
-            <a:ext cx="10515600" cy="5029200"/>
-          </a:xfrm>
-          <a:prstGeom prst="rect">
-            <a:avLst/>
-          </a:prstGeom>
-          <a:noFill/>
-        </p:spPr>
-        <p:txBody>
-          <a:bodyPr wrap="square">
-            <a:spAutoFit/>
-          </a:bodyPr>
-          <a:lstStyle/>
-          <a:p>
-            <a:pPr>
-              <a:spcAft>
-                <a:spcPts val="600"/>
-              </a:spcAft>
-              <a:defRPr sz="1600">
-                <a:solidFill>
-                  <a:srgbClr val="1A1A2E"/>
-                </a:solidFill>
-                <a:latin typeface="Apple SD Gothic Neo"/>
-              </a:defRPr>
-            </a:pPr>
-            <a:r>
-              <a:rPr>
-                <a:ea typeface="Apple SD Gothic Neo"/>
-                <a:latin typeface="Apple SD Gothic Neo"/>
-              </a:rPr>
-              <a:t>• **AI Trends 2025-2026: The Age of Agentic AI**</a:t>
-            </a:r>
-          </a:p>
-          <a:p>
-            <a:pPr>
-              <a:spcAft>
-                <a:spcPts val="600"/>
-              </a:spcAft>
-              <a:defRPr sz="1600">
-                <a:solidFill>
-                  <a:srgbClr val="1A1A2E"/>
-                </a:solidFill>
-                <a:latin typeface="Apple SD Gothic Neo"/>
-              </a:defRPr>
-            </a:pPr>
-            <a:r>
-              <a:rPr>
-                <a:ea typeface="Apple SD Gothic Neo"/>
-                <a:latin typeface="Apple SD Gothic Neo"/>
-              </a:rPr>
-              <a:t>• **The Past Year in Review**</a:t>
-            </a:r>
-          </a:p>
-          <a:p>
-            <a:pPr>
-              <a:spcAft>
-                <a:spcPts val="600"/>
-              </a:spcAft>
-              <a:defRPr sz="1600">
-                <a:solidFill>
-                  <a:srgbClr val="1A1A2E"/>
-                </a:solidFill>
-                <a:latin typeface="Apple SD Gothic Neo"/>
-              </a:defRPr>
-            </a:pPr>
-            <a:r>
-              <a:rPr>
-                <a:ea typeface="Apple SD Gothic Neo"/>
-                <a:latin typeface="Apple SD Gothic Neo"/>
-              </a:rPr>
-              <a:t>• **The LLM Race: A Five-Way Battle**</a:t>
-            </a:r>
-          </a:p>
-          <a:p>
-            <a:pPr>
-              <a:spcAft>
-                <a:spcPts val="600"/>
-              </a:spcAft>
-              <a:defRPr sz="1600">
-                <a:solidFill>
-                  <a:srgbClr val="1A1A2E"/>
-                </a:solidFill>
-                <a:latin typeface="Apple SD Gothic Neo"/>
-              </a:defRPr>
-            </a:pPr>
-            <a:r>
-              <a:rPr>
-                <a:ea typeface="Apple SD Gothic Neo"/>
-                <a:latin typeface="Apple SD Gothic Neo"/>
-              </a:rPr>
-              <a:t>• **MCP: Rise, Limits, and the Native AI Era**</a:t>
-            </a:r>
-          </a:p>
-          <a:p>
-            <a:pPr>
-              <a:spcAft>
-                <a:spcPts val="600"/>
-              </a:spcAft>
-              <a:defRPr sz="1600">
-                <a:solidFill>
-                  <a:srgbClr val="1A1A2E"/>
-                </a:solidFill>
-                <a:latin typeface="Apple SD Gothic Neo"/>
-              </a:defRPr>
-            </a:pPr>
-            <a:r>
-              <a:rPr>
-                <a:ea typeface="Apple SD Gothic Neo"/>
-                <a:latin typeface="Apple SD Gothic Neo"/>
-              </a:rPr>
-              <a:t>• **From Vibe Coding to Agentic Engineering**</a:t>
-            </a:r>
-          </a:p>
-          <a:p>
-            <a:pPr>
-              <a:spcAft>
-                <a:spcPts val="600"/>
-              </a:spcAft>
-              <a:defRPr sz="1600">
-                <a:solidFill>
-                  <a:srgbClr val="1A1A2E"/>
-                </a:solidFill>
-                <a:latin typeface="Apple SD Gothic Neo"/>
-              </a:defRPr>
-            </a:pPr>
-            <a:r>
-              <a:rPr>
-                <a:ea typeface="Apple SD Gothic Neo"/>
-                <a:latin typeface="Apple SD Gothic Neo"/>
-              </a:rPr>
-              <a:t>• **Context Engineering: The New Essential Skill**</a:t>
-            </a:r>
-          </a:p>
-          <a:p>
-            <a:pPr>
-              <a:spcAft>
-                <a:spcPts val="600"/>
-              </a:spcAft>
-              <a:defRPr sz="1600">
-                <a:solidFill>
-                  <a:srgbClr val="1A1A2E"/>
-                </a:solidFill>
-                <a:latin typeface="Apple SD Gothic Neo"/>
-              </a:defRPr>
-            </a:pPr>
-            <a:r>
-              <a:rPr>
-                <a:ea typeface="Apple SD Gothic Neo"/>
-                <a:latin typeface="Apple SD Gothic Neo"/>
-              </a:rPr>
-              <a:t>• **Agentic AI Deep Dive**</a:t>
-            </a:r>
-          </a:p>
-          <a:p>
-            <a:pPr>
-              <a:spcAft>
-                <a:spcPts val="600"/>
-              </a:spcAft>
-              <a:defRPr sz="1600">
-                <a:solidFill>
-                  <a:srgbClr val="1A1A2E"/>
-                </a:solidFill>
-                <a:latin typeface="Apple SD Gothic Neo"/>
-              </a:defRPr>
-            </a:pPr>
-            <a:r>
-              <a:rPr>
-                <a:ea typeface="Apple SD Gothic Neo"/>
-                <a:latin typeface="Apple SD Gothic Neo"/>
-              </a:rPr>
-              <a:t>• **n8n: Making Agentic AI Real**</a:t>
-            </a:r>
-          </a:p>
-          <a:p>
-            <a:pPr>
-              <a:spcAft>
-                <a:spcPts val="600"/>
-              </a:spcAft>
-              <a:defRPr sz="1600">
-                <a:solidFill>
-                  <a:srgbClr val="1A1A2E"/>
-                </a:solidFill>
-                <a:latin typeface="Apple SD Gothic Neo"/>
-              </a:defRPr>
-            </a:pPr>
-            <a:r>
-              <a:rPr>
-                <a:ea typeface="Apple SD Gothic Neo"/>
-                <a:latin typeface="Apple SD Gothic Neo"/>
-              </a:rPr>
-              <a:t>• **Conclusion: What We Can Do Right Now**</a:t>
+          <a:p>
+            <a:pPr>
+              <a:spcAft>
+                <a:spcPts val="400"/>
+              </a:spcAft>
+            </a:pPr>
+            <a:r>
+              <a:rPr>
+                <a:ea typeface="Apple SD Gothic Neo"/>
+                <a:latin typeface="Apple SD Gothic Neo"/>
+              </a:rPr>
+              <a:t>**The Past Year in Review**</a:t>
+            </a:r>
+          </a:p>
+          <a:p>
+            <a:pPr>
+              <a:spcAft>
+                <a:spcPts val="400"/>
+              </a:spcAft>
+            </a:pPr>
+            <a:r>
+              <a:rPr>
+                <a:ea typeface="Apple SD Gothic Neo"/>
+                <a:latin typeface="Apple SD Gothic Neo"/>
+              </a:rPr>
+              <a:t>**The LLM Race: A Five-Way Battle**</a:t>
+            </a:r>
+          </a:p>
+          <a:p>
+            <a:pPr>
+              <a:spcAft>
+                <a:spcPts val="400"/>
+              </a:spcAft>
+            </a:pPr>
+            <a:r>
+              <a:rPr>
+                <a:ea typeface="Apple SD Gothic Neo"/>
+                <a:latin typeface="Apple SD Gothic Neo"/>
+              </a:rPr>
+              <a:t>**MCP: Rise, Limits, and the Native AI Era**</a:t>
+            </a:r>
+          </a:p>
+          <a:p>
+            <a:pPr>
+              <a:spcAft>
+                <a:spcPts val="400"/>
+              </a:spcAft>
+            </a:pPr>
+            <a:r>
+              <a:rPr>
+                <a:ea typeface="Apple SD Gothic Neo"/>
+                <a:latin typeface="Apple SD Gothic Neo"/>
+              </a:rPr>
+              <a:t>**From Vibe Coding to Agentic Engineering**</a:t>
+            </a:r>
+          </a:p>
+          <a:p>
+            <a:pPr>
+              <a:spcAft>
+                <a:spcPts val="400"/>
+              </a:spcAft>
+            </a:pPr>
+            <a:r>
+              <a:rPr>
+                <a:ea typeface="Apple SD Gothic Neo"/>
+                <a:latin typeface="Apple SD Gothic Neo"/>
+              </a:rPr>
+              <a:t>**Context Engineering: The New Essential Skill**</a:t>
+            </a:r>
+          </a:p>
+          <a:p>
+            <a:pPr>
+              <a:spcAft>
+                <a:spcPts val="400"/>
+              </a:spcAft>
+            </a:pPr>
+            <a:r>
+              <a:rPr>
+                <a:ea typeface="Apple SD Gothic Neo"/>
+                <a:latin typeface="Apple SD Gothic Neo"/>
+              </a:rPr>
+              <a:t>**Agentic AI Deep Dive**</a:t>
+            </a:r>
+          </a:p>
+          <a:p>
+            <a:pPr>
+              <a:spcAft>
+                <a:spcPts val="400"/>
+              </a:spcAft>
+            </a:pPr>
+            <a:r>
+              <a:rPr>
+                <a:ea typeface="Apple SD Gothic Neo"/>
+                <a:latin typeface="Apple SD Gothic Neo"/>
+              </a:rPr>
+              <a:t>**n8n: Making Agentic AI Real**</a:t>
+            </a:r>
+          </a:p>
+          <a:p>
+            <a:pPr>
+              <a:spcAft>
+                <a:spcPts val="400"/>
+              </a:spcAft>
+            </a:pPr>
+            <a:r>
+              <a:rPr>
+                <a:ea typeface="Apple SD Gothic Neo"/>
+                <a:latin typeface="Apple SD Gothic Neo"/>
+              </a:rPr>
+              <a:t>**Conclusion: What We Can Do Right Now**</a:t>
             </a:r>
           </a:p>
         </p:txBody>
@@ -3903,14 +3679,6 @@
 <file path=ppt/slides/slide2.xml><?xml version="1.0" encoding="utf-8"?>
 <p:sld xmlns:a="http://schemas.openxmlformats.org/drawingml/2006/main" xmlns:p="http://schemas.openxmlformats.org/presentationml/2006/main" xmlns:r="http://schemas.openxmlformats.org/officeDocument/2006/relationships">
   <p:cSld>
-    <p:bg>
-      <p:bgPr>
-        <a:solidFill>
-          <a:srgbClr val="FAFAFC"/>
-        </a:solidFill>
-        <a:effectLst/>
-      </p:bgPr>
-    </p:bg>
     <p:spTree>
       <p:nvGrpSpPr>
         <p:cNvPr id="1" name=""/>
@@ -3925,69 +3693,176 @@
             <a:spLocks noGrp="1"/>
           </p:cNvSpPr>
           <p:nvPr>
-            <p:ph type="ctrTitle"/>
-          </p:nvPr>
-        </p:nvSpPr>
-        <p:spPr/>
-        <p:txBody>
-          <a:bodyPr/>
-          <a:lstStyle/>
-          <a:p/>
-        </p:txBody>
-      </p:sp>
-      <p:sp>
-        <p:nvSpPr>
-          <p:cNvPr id="3" name="Subtitle 2"/>
-          <p:cNvSpPr>
-            <a:spLocks noGrp="1"/>
-          </p:cNvSpPr>
-          <p:nvPr>
-            <p:ph type="subTitle" idx="1"/>
-          </p:nvPr>
-        </p:nvSpPr>
-        <p:spPr/>
-        <p:txBody>
-          <a:bodyPr/>
-          <a:lstStyle/>
-          <a:p/>
-        </p:txBody>
-      </p:sp>
-      <p:sp>
-        <p:nvSpPr>
-          <p:cNvPr id="4" name="TextBox 3"/>
-          <p:cNvSpPr txBox="1"/>
-          <p:nvPr/>
-        </p:nvSpPr>
-        <p:spPr>
-          <a:xfrm>
-            <a:off x="914400" y="1828800"/>
-            <a:ext cx="10058400" cy="1371600"/>
-          </a:xfrm>
-          <a:prstGeom prst="rect">
-            <a:avLst/>
-          </a:prstGeom>
-          <a:noFill/>
-        </p:spPr>
-        <p:txBody>
-          <a:bodyPr wrap="square">
-            <a:spAutoFit/>
-          </a:bodyPr>
-          <a:lstStyle/>
-          <a:p>
-            <a:pPr algn="ctr">
-              <a:defRPr sz="4000" b="1">
-                <a:solidFill>
-                  <a:srgbClr val="1A1A2E"/>
-                </a:solidFill>
-                <a:latin typeface="Apple SD Gothic Neo"/>
-              </a:defRPr>
-            </a:pPr>
-            <a:r>
-              <a:rPr>
-                <a:ea typeface="Apple SD Gothic Neo"/>
-                <a:latin typeface="Apple SD Gothic Neo"/>
-              </a:rPr>
-              <a:t>AI Trends 2025-2026: The Age of Agentic AI</a:t>
+            <p:ph type="title"/>
+          </p:nvPr>
+        </p:nvSpPr>
+        <p:spPr/>
+        <p:txBody>
+          <a:bodyPr/>
+          <a:lstStyle/>
+          <a:p>
+            <a:r>
+              <a:rPr>
+                <a:ea typeface="Apple SD Gothic Neo"/>
+                <a:latin typeface="Apple SD Gothic Neo"/>
+              </a:rPr>
+              <a:t>The Past Year in Review</a:t>
+            </a:r>
+          </a:p>
+        </p:txBody>
+      </p:sp>
+      <p:sp>
+        <p:nvSpPr>
+          <p:cNvPr id="3" name="Content Placeholder 2"/>
+          <p:cNvSpPr>
+            <a:spLocks noGrp="1"/>
+          </p:cNvSpPr>
+          <p:nvPr>
+            <p:ph idx="1"/>
+          </p:nvPr>
+        </p:nvSpPr>
+        <p:spPr/>
+        <p:txBody>
+          <a:bodyPr/>
+          <a:lstStyle/>
+          <a:p>
+            <a:pPr>
+              <a:spcAft>
+                <a:spcPts val="400"/>
+              </a:spcAft>
+            </a:pPr>
+            <a:r>
+              <a:rPr>
+                <a:ea typeface="Apple SD Gothic Neo"/>
+                <a:latin typeface="Apple SD Gothic Neo"/>
+              </a:rPr>
+              <a:t>**2024.11** MCP announced (Anthropic) — AI-to-tool connectivity standard emerges</a:t>
+            </a:r>
+          </a:p>
+          <a:p>
+            <a:pPr>
+              <a:spcAft>
+                <a:spcPts val="400"/>
+              </a:spcAft>
+            </a:pPr>
+            <a:r>
+              <a:rPr>
+                <a:ea typeface="Apple SD Gothic Neo"/>
+                <a:latin typeface="Apple SD Gothic Neo"/>
+              </a:rPr>
+              <a:t>**2025.01** DeepSeek R1 released — open-source shockwave, price war begins</a:t>
+            </a:r>
+          </a:p>
+          <a:p>
+            <a:pPr>
+              <a:spcAft>
+                <a:spcPts val="400"/>
+              </a:spcAft>
+            </a:pPr>
+            <a:r>
+              <a:rPr>
+                <a:ea typeface="Apple SD Gothic Neo"/>
+                <a:latin typeface="Apple SD Gothic Neo"/>
+              </a:rPr>
+              <a:t>**2025.02** "Vibe Coding" coined (Karpathy) — writing code without reading it</a:t>
+            </a:r>
+          </a:p>
+          <a:p>
+            <a:pPr>
+              <a:spcAft>
+                <a:spcPts val="400"/>
+              </a:spcAft>
+            </a:pPr>
+            <a:r>
+              <a:rPr>
+                <a:ea typeface="Apple SD Gothic Neo"/>
+                <a:latin typeface="Apple SD Gothic Neo"/>
+              </a:rPr>
+              <a:t>**2025.03** OpenAI Agents SDK — agent framework competition heats up</a:t>
+            </a:r>
+          </a:p>
+          <a:p>
+            <a:pPr>
+              <a:spcAft>
+                <a:spcPts val="400"/>
+              </a:spcAft>
+            </a:pPr>
+            <a:r>
+              <a:rPr>
+                <a:ea typeface="Apple SD Gothic Neo"/>
+                <a:latin typeface="Apple SD Gothic Neo"/>
+              </a:rPr>
+              <a:t>**2025.05** Claude Code launched — CLI-based AI agents begin</a:t>
+            </a:r>
+          </a:p>
+          <a:p>
+            <a:pPr>
+              <a:spcAft>
+                <a:spcPts val="400"/>
+              </a:spcAft>
+            </a:pPr>
+            <a:r>
+              <a:rPr>
+                <a:ea typeface="Apple SD Gothic Neo"/>
+                <a:latin typeface="Apple SD Gothic Neo"/>
+              </a:rPr>
+              <a:t>**2025.09** Notion 3.0 AI Agents — services embed their own AI agents</a:t>
+            </a:r>
+          </a:p>
+          <a:p>
+            <a:pPr>
+              <a:spcAft>
+                <a:spcPts val="400"/>
+              </a:spcAft>
+            </a:pPr>
+            <a:r>
+              <a:rPr>
+                <a:ea typeface="Apple SD Gothic Neo"/>
+                <a:latin typeface="Apple SD Gothic Neo"/>
+              </a:rPr>
+              <a:t>**2025.10** n8n Series C $180M (Nvidia) — massive bet on workflow + AI</a:t>
+            </a:r>
+          </a:p>
+          <a:p>
+            <a:pPr>
+              <a:spcAft>
+                <a:spcPts val="400"/>
+              </a:spcAft>
+            </a:pPr>
+            <a:r>
+              <a:rPr>
+                <a:ea typeface="Apple SD Gothic Neo"/>
+                <a:latin typeface="Apple SD Gothic Neo"/>
+              </a:rPr>
+              <a:t>**2025.12** MCP → Linux Foundation — standard established, industry moves on</a:t>
+            </a:r>
+          </a:p>
+          <a:p>
+            <a:pPr>
+              <a:spcAft>
+                <a:spcPts val="400"/>
+              </a:spcAft>
+            </a:pPr>
+            <a:r>
+              <a:rPr>
+                <a:ea typeface="Apple SD Gothic Neo"/>
+                <a:latin typeface="Apple SD Gothic Neo"/>
+              </a:rPr>
+              <a:t>**2026.01** OpenClaw viral (250K stars) — peak and controversy of vibe coding</a:t>
+            </a:r>
+          </a:p>
+          <a:p>
+            <a:pPr>
+              <a:spcAft>
+                <a:spcPts val="400"/>
+              </a:spcAft>
+            </a:pPr>
+            <a:r>
+              <a:rPr>
+                <a:ea typeface="Apple SD Gothic Neo"/>
+                <a:latin typeface="Apple SD Gothic Neo"/>
+              </a:rPr>
+              <a:t>**2026.02** Claude 4.6 / Karpathy: "Vibe coding is behind us" — agentic engineering era</a:t>
             </a:r>
           </a:p>
         </p:txBody>
@@ -4003,14 +3878,6 @@
 <file path=ppt/slides/slide3.xml><?xml version="1.0" encoding="utf-8"?>
 <p:sld xmlns:a="http://schemas.openxmlformats.org/drawingml/2006/main" xmlns:p="http://schemas.openxmlformats.org/presentationml/2006/main" xmlns:r="http://schemas.openxmlformats.org/officeDocument/2006/relationships">
   <p:cSld>
-    <p:bg>
-      <p:bgPr>
-        <a:solidFill>
-          <a:srgbClr val="FAFAFC"/>
-        </a:solidFill>
-        <a:effectLst/>
-      </p:bgPr>
-    </p:bg>
     <p:spTree>
       <p:nvGrpSpPr>
         <p:cNvPr id="1" name=""/>
@@ -4020,40 +3887,203 @@
       <p:grpSpPr/>
       <p:sp>
         <p:nvSpPr>
-          <p:cNvPr id="2" name="TextBox 1"/>
-          <p:cNvSpPr txBox="1"/>
-          <p:nvPr/>
-        </p:nvSpPr>
-        <p:spPr>
-          <a:xfrm>
-            <a:off x="457200" y="274320"/>
-            <a:ext cx="10972800" cy="731520"/>
-          </a:xfrm>
-          <a:prstGeom prst="rect">
-            <a:avLst/>
-          </a:prstGeom>
-          <a:noFill/>
-        </p:spPr>
-        <p:txBody>
-          <a:bodyPr wrap="square">
-            <a:spAutoFit/>
-          </a:bodyPr>
-          <a:lstStyle/>
-          <a:p>
-            <a:pPr algn="l">
-              <a:defRPr sz="2800" b="1">
-                <a:solidFill>
-                  <a:srgbClr val="1A1A2E"/>
-                </a:solidFill>
-                <a:latin typeface="Apple SD Gothic Neo"/>
-              </a:defRPr>
-            </a:pPr>
-            <a:r>
-              <a:rPr>
-                <a:ea typeface="Apple SD Gothic Neo"/>
-                <a:latin typeface="Apple SD Gothic Neo"/>
-              </a:rPr>
-              <a:t>The Past Year in Review</a:t>
+          <p:cNvPr id="2" name="Title 1"/>
+          <p:cNvSpPr>
+            <a:spLocks noGrp="1"/>
+          </p:cNvSpPr>
+          <p:nvPr>
+            <p:ph type="title"/>
+          </p:nvPr>
+        </p:nvSpPr>
+        <p:spPr/>
+        <p:txBody>
+          <a:bodyPr/>
+          <a:lstStyle/>
+          <a:p>
+            <a:r>
+              <a:rPr>
+                <a:ea typeface="Apple SD Gothic Neo"/>
+                <a:latin typeface="Apple SD Gothic Neo"/>
+              </a:rPr>
+              <a:t>The LLM Race: A Five-Way Battle</a:t>
+            </a:r>
+          </a:p>
+        </p:txBody>
+      </p:sp>
+      <p:sp>
+        <p:nvSpPr>
+          <p:cNvPr id="3" name="Text Placeholder 2"/>
+          <p:cNvSpPr>
+            <a:spLocks noGrp="1"/>
+          </p:cNvSpPr>
+          <p:nvPr>
+            <p:ph type="body" idx="1"/>
+          </p:nvPr>
+        </p:nvSpPr>
+        <p:spPr/>
+        <p:txBody>
+          <a:bodyPr/>
+          <a:lstStyle/>
+          <a:p/>
+        </p:txBody>
+      </p:sp>
+      <p:sp>
+        <p:nvSpPr>
+          <p:cNvPr id="4" name="Content Placeholder 3"/>
+          <p:cNvSpPr>
+            <a:spLocks noGrp="1"/>
+          </p:cNvSpPr>
+          <p:nvPr>
+            <p:ph idx="2" sz="half"/>
+          </p:nvPr>
+        </p:nvSpPr>
+        <p:spPr/>
+        <p:txBody>
+          <a:bodyPr/>
+          <a:lstStyle/>
+          <a:p>
+            <a:pPr>
+              <a:spcAft>
+                <a:spcPts val="400"/>
+              </a:spcAft>
+            </a:pPr>
+            <a:r>
+              <a:rPr>
+                <a:ea typeface="Apple SD Gothic Neo"/>
+                <a:latin typeface="Apple SD Gothic Neo"/>
+              </a:rPr>
+              <a:t>**OpenAI** — GPT-4.1, o3, o4-mini: Reasoning-focused, 1M tokens, price competitive</a:t>
+            </a:r>
+          </a:p>
+          <a:p>
+            <a:pPr>
+              <a:spcAft>
+                <a:spcPts val="400"/>
+              </a:spcAft>
+            </a:pPr>
+            <a:r>
+              <a:rPr>
+                <a:ea typeface="Apple SD Gothic Neo"/>
+                <a:latin typeface="Apple SD Gothic Neo"/>
+              </a:rPr>
+              <a:t>**Anthropic** — Claude Sonnet/Opus 4.6: #1 coding, 30h+ autonomous tasks, agent teams</a:t>
+            </a:r>
+          </a:p>
+          <a:p>
+            <a:pPr>
+              <a:spcAft>
+                <a:spcPts val="400"/>
+              </a:spcAft>
+            </a:pPr>
+            <a:r>
+              <a:rPr>
+                <a:ea typeface="Apple SD Gothic Neo"/>
+                <a:latin typeface="Apple SD Gothic Neo"/>
+              </a:rPr>
+              <a:t>**Google** — Gemini 2.5 Pro: 1M tokens, Deep Think mode, top math/coding</a:t>
+            </a:r>
+          </a:p>
+          <a:p>
+            <a:pPr>
+              <a:spcAft>
+                <a:spcPts val="400"/>
+              </a:spcAft>
+            </a:pPr>
+            <a:r>
+              <a:rPr>
+                <a:ea typeface="Apple SD Gothic Neo"/>
+                <a:latin typeface="Apple SD Gothic Neo"/>
+              </a:rPr>
+              <a:t>**Open Source** — DeepSeek R1, Llama 4 Scout (10M tokens): Price disruption + rapid catch-up</a:t>
+            </a:r>
+          </a:p>
+        </p:txBody>
+      </p:sp>
+      <p:sp>
+        <p:nvSpPr>
+          <p:cNvPr id="5" name="Text Placeholder 4"/>
+          <p:cNvSpPr>
+            <a:spLocks noGrp="1"/>
+          </p:cNvSpPr>
+          <p:nvPr>
+            <p:ph type="body" idx="3" sz="quarter"/>
+          </p:nvPr>
+        </p:nvSpPr>
+        <p:spPr/>
+        <p:txBody>
+          <a:bodyPr/>
+          <a:lstStyle/>
+          <a:p/>
+        </p:txBody>
+      </p:sp>
+      <p:sp>
+        <p:nvSpPr>
+          <p:cNvPr id="6" name="Content Placeholder 5"/>
+          <p:cNvSpPr>
+            <a:spLocks noGrp="1"/>
+          </p:cNvSpPr>
+          <p:nvPr>
+            <p:ph idx="4" sz="quarter"/>
+          </p:nvPr>
+        </p:nvSpPr>
+        <p:spPr/>
+        <p:txBody>
+          <a:bodyPr/>
+          <a:lstStyle/>
+          <a:p>
+            <a:pPr>
+              <a:spcAft>
+                <a:spcPts val="400"/>
+              </a:spcAft>
+            </a:pPr>
+            <a:r>
+              <a:rPr>
+                <a:ea typeface="Apple SD Gothic Neo"/>
+                <a:latin typeface="Apple SD Gothic Neo"/>
+              </a:rPr>
+              <a:t>**Challengers** — xAI Grok 3, Mistral: 200K GPU infra, EU data sovereignty</a:t>
+            </a:r>
+          </a:p>
+          <a:p>
+            <a:pPr>
+              <a:spcAft>
+                <a:spcPts val="400"/>
+              </a:spcAft>
+            </a:pPr>
+            <a:r>
+              <a:rPr>
+                <a:ea typeface="Apple SD Gothic Neo"/>
+                <a:latin typeface="Apple SD Gothic Neo"/>
+              </a:rPr>
+              <a:t>2024: Highest benchmark wins</a:t>
+            </a:r>
+          </a:p>
+          <a:p>
+            <a:pPr>
+              <a:spcAft>
+                <a:spcPts val="400"/>
+              </a:spcAft>
+            </a:pPr>
+            <a:r>
+              <a:rPr>
+                <a:ea typeface="Apple SD Gothic Neo"/>
+                <a:latin typeface="Apple SD Gothic Neo"/>
+              </a:rPr>
+              <a:t>2025: How long can it work autonomously?</a:t>
+            </a:r>
+          </a:p>
+          <a:p>
+            <a:pPr>
+              <a:spcAft>
+                <a:spcPts val="400"/>
+              </a:spcAft>
+            </a:pPr>
+            <a:r>
+              <a:rPr>
+                <a:ea typeface="Apple SD Gothic Neo"/>
+                <a:latin typeface="Apple SD Gothic Neo"/>
+              </a:rPr>
+              <a:t>2026: How well can it orchestrate agent teams?</a:t>
             </a:r>
           </a:p>
         </p:txBody>
@@ -4069,14 +4099,6 @@
 <file path=ppt/slides/slide4.xml><?xml version="1.0" encoding="utf-8"?>
 <p:sld xmlns:a="http://schemas.openxmlformats.org/drawingml/2006/main" xmlns:p="http://schemas.openxmlformats.org/presentationml/2006/main" xmlns:r="http://schemas.openxmlformats.org/officeDocument/2006/relationships">
   <p:cSld>
-    <p:bg>
-      <p:bgPr>
-        <a:solidFill>
-          <a:srgbClr val="FAFAFC"/>
-        </a:solidFill>
-        <a:effectLst/>
-      </p:bgPr>
-    </p:bg>
     <p:spTree>
       <p:nvGrpSpPr>
         <p:cNvPr id="1" name=""/>
@@ -4098,266 +4120,114 @@
         <p:txBody>
           <a:bodyPr/>
           <a:lstStyle/>
-          <a:p/>
-        </p:txBody>
-      </p:sp>
-      <p:sp>
-        <p:nvSpPr>
-          <p:cNvPr id="3" name="Text Placeholder 2"/>
-          <p:cNvSpPr>
-            <a:spLocks noGrp="1"/>
-          </p:cNvSpPr>
-          <p:nvPr>
-            <p:ph type="body" idx="1"/>
-          </p:nvPr>
-        </p:nvSpPr>
-        <p:spPr/>
-        <p:txBody>
-          <a:bodyPr/>
-          <a:lstStyle/>
-          <a:p/>
-        </p:txBody>
-      </p:sp>
-      <p:sp>
-        <p:nvSpPr>
-          <p:cNvPr id="4" name="Content Placeholder 3"/>
-          <p:cNvSpPr>
-            <a:spLocks noGrp="1"/>
-          </p:cNvSpPr>
-          <p:nvPr>
-            <p:ph idx="2" sz="half"/>
-          </p:nvPr>
-        </p:nvSpPr>
-        <p:spPr/>
-        <p:txBody>
-          <a:bodyPr/>
-          <a:lstStyle/>
-          <a:p/>
-        </p:txBody>
-      </p:sp>
-      <p:sp>
-        <p:nvSpPr>
-          <p:cNvPr id="5" name="Text Placeholder 4"/>
-          <p:cNvSpPr>
-            <a:spLocks noGrp="1"/>
-          </p:cNvSpPr>
-          <p:nvPr>
-            <p:ph type="body" idx="3" sz="quarter"/>
-          </p:nvPr>
-        </p:nvSpPr>
-        <p:spPr/>
-        <p:txBody>
-          <a:bodyPr/>
-          <a:lstStyle/>
-          <a:p/>
-        </p:txBody>
-      </p:sp>
-      <p:sp>
-        <p:nvSpPr>
-          <p:cNvPr id="6" name="Content Placeholder 5"/>
-          <p:cNvSpPr>
-            <a:spLocks noGrp="1"/>
-          </p:cNvSpPr>
-          <p:nvPr>
-            <p:ph idx="4" sz="quarter"/>
-          </p:nvPr>
-        </p:nvSpPr>
-        <p:spPr/>
-        <p:txBody>
-          <a:bodyPr/>
-          <a:lstStyle/>
-          <a:p/>
-        </p:txBody>
-      </p:sp>
-      <p:sp>
-        <p:nvSpPr>
-          <p:cNvPr id="7" name="TextBox 6"/>
-          <p:cNvSpPr txBox="1"/>
-          <p:nvPr/>
-        </p:nvSpPr>
-        <p:spPr>
-          <a:xfrm>
-            <a:off x="457200" y="274320"/>
-            <a:ext cx="10972800" cy="731520"/>
-          </a:xfrm>
-          <a:prstGeom prst="rect">
-            <a:avLst/>
-          </a:prstGeom>
-          <a:noFill/>
-        </p:spPr>
-        <p:txBody>
-          <a:bodyPr wrap="square">
-            <a:spAutoFit/>
-          </a:bodyPr>
-          <a:lstStyle/>
-          <a:p>
-            <a:pPr algn="l">
-              <a:defRPr sz="2800" b="1">
-                <a:solidFill>
-                  <a:srgbClr val="1A1A2E"/>
-                </a:solidFill>
-                <a:latin typeface="Apple SD Gothic Neo"/>
-              </a:defRPr>
-            </a:pPr>
-            <a:r>
-              <a:rPr>
-                <a:ea typeface="Apple SD Gothic Neo"/>
-                <a:latin typeface="Apple SD Gothic Neo"/>
-              </a:rPr>
-              <a:t>The LLM Race: A Five-Way Battle</a:t>
-            </a:r>
-          </a:p>
-        </p:txBody>
-      </p:sp>
-      <p:sp>
-        <p:nvSpPr>
-          <p:cNvPr id="8" name="Rectangle 7"/>
-          <p:cNvSpPr/>
-          <p:nvPr/>
-        </p:nvSpPr>
-        <p:spPr>
-          <a:xfrm>
-            <a:off x="457200" y="1371600"/>
-            <a:ext cx="5303520" cy="5029200"/>
-          </a:xfrm>
-          <a:prstGeom prst="rect">
-            <a:avLst/>
-          </a:prstGeom>
-          <a:solidFill>
-            <a:srgbClr val="F0F0F5"/>
-          </a:solidFill>
-          <a:ln>
-            <a:noFill/>
-          </a:ln>
-        </p:spPr>
-        <p:style>
-          <a:lnRef idx="1">
-            <a:schemeClr val="accent1"/>
-          </a:lnRef>
-          <a:fillRef idx="3">
-            <a:schemeClr val="accent1"/>
-          </a:fillRef>
-          <a:effectRef idx="2">
-            <a:schemeClr val="accent1"/>
-          </a:effectRef>
-          <a:fontRef idx="minor">
-            <a:schemeClr val="lt1"/>
-          </a:fontRef>
-        </p:style>
-        <p:txBody>
-          <a:bodyPr rtlCol="0" anchor="ctr"/>
-          <a:lstStyle/>
-          <a:p>
-            <a:pPr algn="ctr"/>
-          </a:p>
-        </p:txBody>
-      </p:sp>
-      <p:sp>
-        <p:nvSpPr>
-          <p:cNvPr id="9" name="TextBox 8"/>
-          <p:cNvSpPr txBox="1"/>
-          <p:nvPr/>
-        </p:nvSpPr>
-        <p:spPr>
-          <a:xfrm>
-            <a:off x="731520" y="1554480"/>
-            <a:ext cx="4754880" cy="548640"/>
-          </a:xfrm>
-          <a:prstGeom prst="rect">
-            <a:avLst/>
-          </a:prstGeom>
-          <a:noFill/>
-        </p:spPr>
-        <p:txBody>
-          <a:bodyPr wrap="square">
-            <a:spAutoFit/>
-          </a:bodyPr>
-          <a:lstStyle/>
-          <a:p>
-            <a:pPr algn="l">
-              <a:defRPr sz="2200" b="1">
-                <a:solidFill>
-                  <a:srgbClr val="0066FF"/>
-                </a:solidFill>
-                <a:latin typeface="Apple SD Gothic Neo"/>
-              </a:defRPr>
-            </a:pPr>
-          </a:p>
-        </p:txBody>
-      </p:sp>
-      <p:sp>
-        <p:nvSpPr>
-          <p:cNvPr id="10" name="Rectangle 9"/>
-          <p:cNvSpPr/>
-          <p:nvPr/>
-        </p:nvSpPr>
-        <p:spPr>
-          <a:xfrm>
-            <a:off x="6217920" y="1371600"/>
-            <a:ext cx="5303520" cy="5029200"/>
-          </a:xfrm>
-          <a:prstGeom prst="rect">
-            <a:avLst/>
-          </a:prstGeom>
-          <a:solidFill>
-            <a:srgbClr val="F0F0F5"/>
-          </a:solidFill>
-          <a:ln>
-            <a:noFill/>
-          </a:ln>
-        </p:spPr>
-        <p:style>
-          <a:lnRef idx="1">
-            <a:schemeClr val="accent1"/>
-          </a:lnRef>
-          <a:fillRef idx="3">
-            <a:schemeClr val="accent1"/>
-          </a:fillRef>
-          <a:effectRef idx="2">
-            <a:schemeClr val="accent1"/>
-          </a:effectRef>
-          <a:fontRef idx="minor">
-            <a:schemeClr val="lt1"/>
-          </a:fontRef>
-        </p:style>
-        <p:txBody>
-          <a:bodyPr rtlCol="0" anchor="ctr"/>
-          <a:lstStyle/>
-          <a:p>
-            <a:pPr algn="ctr"/>
-          </a:p>
-        </p:txBody>
-      </p:sp>
-      <p:sp>
-        <p:nvSpPr>
-          <p:cNvPr id="11" name="TextBox 10"/>
-          <p:cNvSpPr txBox="1"/>
-          <p:nvPr/>
-        </p:nvSpPr>
-        <p:spPr>
-          <a:xfrm>
-            <a:off x="6492240" y="1554480"/>
-            <a:ext cx="4754880" cy="548640"/>
-          </a:xfrm>
-          <a:prstGeom prst="rect">
-            <a:avLst/>
-          </a:prstGeom>
-          <a:noFill/>
-        </p:spPr>
-        <p:txBody>
-          <a:bodyPr wrap="square">
-            <a:spAutoFit/>
-          </a:bodyPr>
-          <a:lstStyle/>
-          <a:p>
-            <a:pPr algn="l">
-              <a:defRPr sz="2200" b="1">
-                <a:solidFill>
-                  <a:srgbClr val="7C3AED"/>
-                </a:solidFill>
-                <a:latin typeface="Apple SD Gothic Neo"/>
-              </a:defRPr>
-            </a:pPr>
+          <a:p>
+            <a:r>
+              <a:rPr>
+                <a:ea typeface="Apple SD Gothic Neo"/>
+                <a:latin typeface="Apple SD Gothic Neo"/>
+              </a:rPr>
+              <a:t>MCP: Rise, Limits, and the Native AI Era</a:t>
+            </a:r>
+          </a:p>
+        </p:txBody>
+      </p:sp>
+      <p:sp>
+        <p:nvSpPr>
+          <p:cNvPr id="3" name="Content Placeholder 2"/>
+          <p:cNvSpPr>
+            <a:spLocks noGrp="1"/>
+          </p:cNvSpPr>
+          <p:nvPr>
+            <p:ph idx="1"/>
+          </p:nvPr>
+        </p:nvSpPr>
+        <p:spPr/>
+        <p:txBody>
+          <a:bodyPr/>
+          <a:lstStyle/>
+          <a:p>
+            <a:pPr>
+              <a:spcAft>
+                <a:spcPts val="400"/>
+              </a:spcAft>
+            </a:pPr>
+            <a:r>
+              <a:rPr>
+                <a:ea typeface="Apple SD Gothic Neo"/>
+                <a:latin typeface="Apple SD Gothic Neo"/>
+              </a:rPr>
+              <a:t>Notion, Linear, GitHub, Slack → all building native AI agents</a:t>
+            </a:r>
+          </a:p>
+          <a:p>
+            <a:pPr>
+              <a:spcAft>
+                <a:spcPts val="400"/>
+              </a:spcAft>
+            </a:pPr>
+            <a:r>
+              <a:rPr>
+                <a:ea typeface="Apple SD Gothic Neo"/>
+                <a:latin typeface="Apple SD Gothic Neo"/>
+              </a:rPr>
+              <a:t>CLI tools are 33% more efficient than MCP for AI agents</a:t>
+            </a:r>
+          </a:p>
+          <a:p>
+            <a:pPr>
+              <a:spcAft>
+                <a:spcPts val="400"/>
+              </a:spcAft>
+            </a:pPr>
+            <a:r>
+              <a:rPr>
+                <a:ea typeface="Apple SD Gothic Neo"/>
+                <a:latin typeface="Apple SD Gothic Neo"/>
+              </a:rPr>
+              <a:t>MCP GitHub server: ~55,000 tokens vs CLI `gh`: ~200 tokens</a:t>
+            </a:r>
+          </a:p>
+          <a:p>
+            <a:pPr>
+              <a:spcAft>
+                <a:spcPts val="400"/>
+              </a:spcAft>
+            </a:pPr>
+            <a:r>
+              <a:rPr>
+                <a:ea typeface="Apple SD Gothic Neo"/>
+                <a:latin typeface="Apple SD Gothic Neo"/>
+              </a:rPr>
+              <a:t>Not going away (already a standard)</a:t>
+            </a:r>
+          </a:p>
+          <a:p>
+            <a:pPr>
+              <a:spcAft>
+                <a:spcPts val="400"/>
+              </a:spcAft>
+            </a:pPr>
+            <a:r>
+              <a:rPr>
+                <a:ea typeface="Apple SD Gothic Neo"/>
+                <a:latin typeface="Apple SD Gothic Neo"/>
+              </a:rPr>
+              <a:t>Shifting from "master key" to "one of several approaches"</a:t>
+            </a:r>
+          </a:p>
+          <a:p>
+            <a:pPr>
+              <a:spcAft>
+                <a:spcPts val="400"/>
+              </a:spcAft>
+            </a:pPr>
+            <a:r>
+              <a:rPr>
+                <a:ea typeface="Apple SD Gothic Neo"/>
+                <a:latin typeface="Apple SD Gothic Neo"/>
+              </a:rPr>
+              <a:t>The real winner: the orchestration layer that combines everything</a:t>
+            </a:r>
           </a:p>
         </p:txBody>
       </p:sp>
@@ -4372,14 +4242,6 @@
 <file path=ppt/slides/slide5.xml><?xml version="1.0" encoding="utf-8"?>
 <p:sld xmlns:a="http://schemas.openxmlformats.org/drawingml/2006/main" xmlns:p="http://schemas.openxmlformats.org/presentationml/2006/main" xmlns:r="http://schemas.openxmlformats.org/officeDocument/2006/relationships">
   <p:cSld>
-    <p:bg>
-      <p:bgPr>
-        <a:solidFill>
-          <a:srgbClr val="FAFAFC"/>
-        </a:solidFill>
-        <a:effectLst/>
-      </p:bgPr>
-    </p:bg>
     <p:spTree>
       <p:nvGrpSpPr>
         <p:cNvPr id="1" name=""/>
@@ -4401,7 +4263,15 @@
         <p:txBody>
           <a:bodyPr/>
           <a:lstStyle/>
-          <a:p/>
+          <a:p>
+            <a:r>
+              <a:rPr>
+                <a:ea typeface="Apple SD Gothic Neo"/>
+                <a:latin typeface="Apple SD Gothic Neo"/>
+              </a:rPr>
+              <a:t>From Vibe Coding to Agentic Engineering</a:t>
+            </a:r>
+          </a:p>
         </p:txBody>
       </p:sp>
       <p:sp>
@@ -4418,188 +4288,102 @@
         <p:txBody>
           <a:bodyPr/>
           <a:lstStyle/>
-          <a:p/>
-        </p:txBody>
-      </p:sp>
-      <p:sp>
-        <p:nvSpPr>
-          <p:cNvPr id="4" name="TextBox 3"/>
-          <p:cNvSpPr txBox="1"/>
-          <p:nvPr/>
-        </p:nvSpPr>
-        <p:spPr>
-          <a:xfrm>
-            <a:off x="457200" y="274320"/>
-            <a:ext cx="10972800" cy="731520"/>
-          </a:xfrm>
-          <a:prstGeom prst="rect">
-            <a:avLst/>
-          </a:prstGeom>
-          <a:noFill/>
-        </p:spPr>
-        <p:txBody>
-          <a:bodyPr wrap="square">
-            <a:spAutoFit/>
-          </a:bodyPr>
-          <a:lstStyle/>
-          <a:p>
-            <a:pPr algn="l">
-              <a:defRPr sz="2800" b="1">
-                <a:solidFill>
-                  <a:srgbClr val="1A1A2E"/>
-                </a:solidFill>
-                <a:latin typeface="Apple SD Gothic Neo"/>
-              </a:defRPr>
-            </a:pPr>
-            <a:r>
-              <a:rPr>
-                <a:ea typeface="Apple SD Gothic Neo"/>
-                <a:latin typeface="Apple SD Gothic Neo"/>
-              </a:rPr>
-              <a:t>MCP: Rise, Limits, and the Native AI Era</a:t>
-            </a:r>
-          </a:p>
-        </p:txBody>
-      </p:sp>
-      <p:sp>
-        <p:nvSpPr>
-          <p:cNvPr id="5" name="TextBox 4"/>
-          <p:cNvSpPr txBox="1"/>
-          <p:nvPr/>
-        </p:nvSpPr>
-        <p:spPr>
-          <a:xfrm>
-            <a:off x="731520" y="1371600"/>
-            <a:ext cx="10515600" cy="5029200"/>
-          </a:xfrm>
-          <a:prstGeom prst="rect">
-            <a:avLst/>
-          </a:prstGeom>
-          <a:noFill/>
-        </p:spPr>
-        <p:txBody>
-          <a:bodyPr wrap="square">
-            <a:spAutoFit/>
-          </a:bodyPr>
-          <a:lstStyle/>
-          <a:p>
-            <a:pPr>
-              <a:spcAft>
-                <a:spcPts val="600"/>
-              </a:spcAft>
-              <a:defRPr sz="1600">
-                <a:solidFill>
-                  <a:srgbClr val="1A1A2E"/>
-                </a:solidFill>
-                <a:latin typeface="Apple SD Gothic Neo"/>
-              </a:defRPr>
-            </a:pPr>
-            <a:r>
-              <a:rPr>
-                <a:ea typeface="Apple SD Gothic Neo"/>
-                <a:latin typeface="Apple SD Gothic Neo"/>
-              </a:rPr>
-              <a:t>• Notion, Linear, GitHub, Slack → all building native AI agents</a:t>
-            </a:r>
-          </a:p>
-          <a:p>
-            <a:pPr>
-              <a:spcAft>
-                <a:spcPts val="600"/>
-              </a:spcAft>
-              <a:defRPr sz="1600">
-                <a:solidFill>
-                  <a:srgbClr val="1A1A2E"/>
-                </a:solidFill>
-                <a:latin typeface="Apple SD Gothic Neo"/>
-              </a:defRPr>
-            </a:pPr>
-            <a:r>
-              <a:rPr>
-                <a:ea typeface="Apple SD Gothic Neo"/>
-                <a:latin typeface="Apple SD Gothic Neo"/>
-              </a:rPr>
-              <a:t>• CLI tools are 33% more efficient than MCP for AI agents</a:t>
-            </a:r>
-          </a:p>
-          <a:p>
-            <a:pPr>
-              <a:spcAft>
-                <a:spcPts val="600"/>
-              </a:spcAft>
-              <a:defRPr sz="1600">
-                <a:solidFill>
-                  <a:srgbClr val="1A1A2E"/>
-                </a:solidFill>
-                <a:latin typeface="Apple SD Gothic Neo"/>
-              </a:defRPr>
-            </a:pPr>
-            <a:r>
-              <a:rPr>
-                <a:ea typeface="Apple SD Gothic Neo"/>
-                <a:latin typeface="Apple SD Gothic Neo"/>
-              </a:rPr>
-              <a:t>• MCP GitHub server: ~55,000 tokens vs CLI `gh`: ~200 tokens</a:t>
-            </a:r>
-          </a:p>
-          <a:p>
-            <a:pPr>
-              <a:spcAft>
-                <a:spcPts val="600"/>
-              </a:spcAft>
-              <a:defRPr sz="1600">
-                <a:solidFill>
-                  <a:srgbClr val="1A1A2E"/>
-                </a:solidFill>
-                <a:latin typeface="Apple SD Gothic Neo"/>
-              </a:defRPr>
-            </a:pPr>
-            <a:r>
-              <a:rPr>
-                <a:ea typeface="Apple SD Gothic Neo"/>
-                <a:latin typeface="Apple SD Gothic Neo"/>
-              </a:rPr>
-              <a:t>• Not going away (already a standard)</a:t>
-            </a:r>
-          </a:p>
-          <a:p>
-            <a:pPr>
-              <a:spcAft>
-                <a:spcPts val="600"/>
-              </a:spcAft>
-              <a:defRPr sz="1600">
-                <a:solidFill>
-                  <a:srgbClr val="1A1A2E"/>
-                </a:solidFill>
-                <a:latin typeface="Apple SD Gothic Neo"/>
-              </a:defRPr>
-            </a:pPr>
-            <a:r>
-              <a:rPr>
-                <a:ea typeface="Apple SD Gothic Neo"/>
-                <a:latin typeface="Apple SD Gothic Neo"/>
-              </a:rPr>
-              <a:t>• Shifting from "master key" to "one of several approaches"</a:t>
-            </a:r>
-          </a:p>
-          <a:p>
-            <a:pPr>
-              <a:spcAft>
-                <a:spcPts val="600"/>
-              </a:spcAft>
-              <a:defRPr sz="1600">
-                <a:solidFill>
-                  <a:srgbClr val="1A1A2E"/>
-                </a:solidFill>
-                <a:latin typeface="Apple SD Gothic Neo"/>
-              </a:defRPr>
-            </a:pPr>
-            <a:r>
-              <a:rPr>
-                <a:ea typeface="Apple SD Gothic Neo"/>
-                <a:latin typeface="Apple SD Gothic Neo"/>
-              </a:rPr>
-              <a:t>• The real winner: the orchestration layer that combines everything</a:t>
+          <a:p>
+            <a:pPr>
+              <a:spcAft>
+                <a:spcPts val="400"/>
+              </a:spcAft>
+            </a:pPr>
+            <a:r>
+              <a:rPr>
+                <a:ea typeface="Apple SD Gothic Neo"/>
+                <a:latin typeface="Apple SD Gothic Neo"/>
+              </a:rPr>
+              <a:t>2023: Autocomplete (Copilot, Tabnine) — "predict the next line"</a:t>
+            </a:r>
+          </a:p>
+          <a:p>
+            <a:pPr>
+              <a:spcAft>
+                <a:spcPts val="400"/>
+              </a:spcAft>
+            </a:pPr>
+            <a:r>
+              <a:rPr>
+                <a:ea typeface="Apple SD Gothic Neo"/>
+                <a:latin typeface="Apple SD Gothic Neo"/>
+              </a:rPr>
+              <a:t>2024: Chat-based IDE (Cursor, Windsurf) — "edit via conversation"</a:t>
+            </a:r>
+          </a:p>
+          <a:p>
+            <a:pPr>
+              <a:spcAft>
+                <a:spcPts val="400"/>
+              </a:spcAft>
+            </a:pPr>
+            <a:r>
+              <a:rPr>
+                <a:ea typeface="Apple SD Gothic Neo"/>
+                <a:latin typeface="Apple SD Gothic Neo"/>
+              </a:rPr>
+              <a:t>2025: CLI Agents (Claude Code, Aider) — "manage projects from terminal"</a:t>
+            </a:r>
+          </a:p>
+          <a:p>
+            <a:pPr>
+              <a:spcAft>
+                <a:spcPts val="400"/>
+              </a:spcAft>
+            </a:pPr>
+            <a:r>
+              <a:rPr>
+                <a:ea typeface="Apple SD Gothic Neo"/>
+                <a:latin typeface="Apple SD Gothic Neo"/>
+              </a:rPr>
+              <a:t>2026: Team Agents (Claude Code Teams, n8n) — "multiple agents collaborating"</a:t>
+            </a:r>
+          </a:p>
+          <a:p>
+            <a:pPr>
+              <a:spcAft>
+                <a:spcPts val="400"/>
+              </a:spcAft>
+            </a:pPr>
+            <a:r>
+              <a:rPr>
+                <a:ea typeface="Apple SD Gothic Neo"/>
+                <a:latin typeface="Apple SD Gothic Neo"/>
+              </a:rPr>
+              <a:t>OpenClaw: 250K+ stars, fastest ever — but 2.74x more security vulnerabilities</a:t>
+            </a:r>
+          </a:p>
+          <a:p>
+            <a:pPr>
+              <a:spcAft>
+                <a:spcPts val="400"/>
+              </a:spcAft>
+            </a:pPr>
+            <a:r>
+              <a:rPr>
+                <a:ea typeface="Apple SD Gothic Neo"/>
+                <a:latin typeface="Apple SD Gothic Neo"/>
+              </a:rPr>
+              <a:t>Karpathy (2026): "Vibe coding is already behind us. Now it's agentic engineering."</a:t>
+            </a:r>
+          </a:p>
+          <a:p>
+            <a:pPr>
+              <a:spcAft>
+                <a:spcPts val="400"/>
+              </a:spcAft>
+            </a:pPr>
+            <a:r>
+              <a:rPr>
+                <a:ea typeface="Apple SD Gothic Neo"/>
+                <a:latin typeface="Apple SD Gothic Neo"/>
+              </a:rPr>
+              <a:t>AI writes the code, humans supervise and orchestrate — the new standard</a:t>
             </a:r>
           </a:p>
         </p:txBody>
@@ -4615,14 +4399,6 @@
 <file path=ppt/slides/slide6.xml><?xml version="1.0" encoding="utf-8"?>
 <p:sld xmlns:a="http://schemas.openxmlformats.org/drawingml/2006/main" xmlns:p="http://schemas.openxmlformats.org/presentationml/2006/main" xmlns:r="http://schemas.openxmlformats.org/officeDocument/2006/relationships">
   <p:cSld>
-    <p:bg>
-      <p:bgPr>
-        <a:solidFill>
-          <a:srgbClr val="FAFAFC"/>
-        </a:solidFill>
-        <a:effectLst/>
-      </p:bgPr>
-    </p:bg>
     <p:spTree>
       <p:nvGrpSpPr>
         <p:cNvPr id="1" name=""/>
@@ -4644,17 +4420,100 @@
         <p:txBody>
           <a:bodyPr/>
           <a:lstStyle/>
+          <a:p>
+            <a:r>
+              <a:rPr>
+                <a:ea typeface="Apple SD Gothic Neo"/>
+                <a:latin typeface="Apple SD Gothic Neo"/>
+              </a:rPr>
+              <a:t>Context Engineering: The New Essential Skill</a:t>
+            </a:r>
+          </a:p>
+        </p:txBody>
+      </p:sp>
+      <p:sp>
+        <p:nvSpPr>
+          <p:cNvPr id="3" name="Text Placeholder 2"/>
+          <p:cNvSpPr>
+            <a:spLocks noGrp="1"/>
+          </p:cNvSpPr>
+          <p:nvPr>
+            <p:ph type="body" idx="1"/>
+          </p:nvPr>
+        </p:nvSpPr>
+        <p:spPr/>
+        <p:txBody>
+          <a:bodyPr/>
+          <a:lstStyle/>
           <a:p/>
         </p:txBody>
       </p:sp>
       <p:sp>
         <p:nvSpPr>
-          <p:cNvPr id="3" name="Content Placeholder 2"/>
-          <p:cNvSpPr>
-            <a:spLocks noGrp="1"/>
-          </p:cNvSpPr>
-          <p:nvPr>
-            <p:ph idx="1"/>
+          <p:cNvPr id="4" name="Content Placeholder 3"/>
+          <p:cNvSpPr>
+            <a:spLocks noGrp="1"/>
+          </p:cNvSpPr>
+          <p:nvPr>
+            <p:ph idx="2" sz="half"/>
+          </p:nvPr>
+        </p:nvSpPr>
+        <p:spPr/>
+        <p:txBody>
+          <a:bodyPr/>
+          <a:lstStyle/>
+          <a:p>
+            <a:pPr>
+              <a:spcAft>
+                <a:spcPts val="400"/>
+              </a:spcAft>
+            </a:pPr>
+            <a:r>
+              <a:rPr>
+                <a:ea typeface="Apple SD Gothic Neo"/>
+                <a:latin typeface="Apple SD Gothic Neo"/>
+              </a:rPr>
+              <a:t>System Prompt — AI's role and rules</a:t>
+            </a:r>
+          </a:p>
+          <a:p>
+            <a:pPr>
+              <a:spcAft>
+                <a:spcPts val="400"/>
+              </a:spcAft>
+            </a:pPr>
+            <a:r>
+              <a:rPr>
+                <a:ea typeface="Apple SD Gothic Neo"/>
+                <a:latin typeface="Apple SD Gothic Neo"/>
+              </a:rPr>
+              <a:t>User Prompt — Current task</a:t>
+            </a:r>
+          </a:p>
+          <a:p>
+            <a:pPr>
+              <a:spcAft>
+                <a:spcPts val="400"/>
+              </a:spcAft>
+            </a:pPr>
+            <a:r>
+              <a:rPr>
+                <a:ea typeface="Apple SD Gothic Neo"/>
+                <a:latin typeface="Apple SD Gothic Neo"/>
+              </a:rPr>
+              <a:t>Conversation History — Context so far</a:t>
+            </a:r>
+          </a:p>
+        </p:txBody>
+      </p:sp>
+      <p:sp>
+        <p:nvSpPr>
+          <p:cNvPr id="5" name="Text Placeholder 4"/>
+          <p:cNvSpPr>
+            <a:spLocks noGrp="1"/>
+          </p:cNvSpPr>
+          <p:nvPr>
+            <p:ph type="body" idx="3" sz="quarter"/>
           </p:nvPr>
         </p:nvSpPr>
         <p:spPr/>
@@ -4666,203 +4525,72 @@
       </p:sp>
       <p:sp>
         <p:nvSpPr>
-          <p:cNvPr id="4" name="TextBox 3"/>
-          <p:cNvSpPr txBox="1"/>
-          <p:nvPr/>
-        </p:nvSpPr>
-        <p:spPr>
-          <a:xfrm>
-            <a:off x="457200" y="274320"/>
-            <a:ext cx="10972800" cy="731520"/>
-          </a:xfrm>
-          <a:prstGeom prst="rect">
-            <a:avLst/>
-          </a:prstGeom>
-          <a:noFill/>
-        </p:spPr>
-        <p:txBody>
-          <a:bodyPr wrap="square">
-            <a:spAutoFit/>
-          </a:bodyPr>
-          <a:lstStyle/>
-          <a:p>
-            <a:pPr algn="l">
-              <a:defRPr sz="2800" b="1">
-                <a:solidFill>
-                  <a:srgbClr val="1A1A2E"/>
-                </a:solidFill>
-                <a:latin typeface="Apple SD Gothic Neo"/>
-              </a:defRPr>
-            </a:pPr>
-            <a:r>
-              <a:rPr>
-                <a:ea typeface="Apple SD Gothic Neo"/>
-                <a:latin typeface="Apple SD Gothic Neo"/>
-              </a:rPr>
-              <a:t>From Vibe Coding to Agentic Engineering</a:t>
-            </a:r>
-          </a:p>
-        </p:txBody>
-      </p:sp>
-      <p:sp>
-        <p:nvSpPr>
-          <p:cNvPr id="5" name="TextBox 4"/>
-          <p:cNvSpPr txBox="1"/>
-          <p:nvPr/>
-        </p:nvSpPr>
-        <p:spPr>
-          <a:xfrm>
-            <a:off x="731520" y="1371600"/>
-            <a:ext cx="10515600" cy="5029200"/>
-          </a:xfrm>
-          <a:prstGeom prst="rect">
-            <a:avLst/>
-          </a:prstGeom>
-          <a:noFill/>
-        </p:spPr>
-        <p:txBody>
-          <a:bodyPr wrap="square">
-            <a:spAutoFit/>
-          </a:bodyPr>
-          <a:lstStyle/>
-          <a:p>
-            <a:pPr>
-              <a:spcAft>
-                <a:spcPts val="600"/>
-              </a:spcAft>
-              <a:defRPr sz="1600">
-                <a:solidFill>
-                  <a:srgbClr val="1A1A2E"/>
-                </a:solidFill>
-                <a:latin typeface="Apple SD Gothic Neo"/>
-              </a:defRPr>
-            </a:pPr>
-            <a:r>
-              <a:rPr>
-                <a:ea typeface="Apple SD Gothic Neo"/>
-                <a:latin typeface="Apple SD Gothic Neo"/>
-              </a:rPr>
-              <a:t>• 2023: Autocomplete (Copilot, Tabnine) — "predict the next line"</a:t>
-            </a:r>
-          </a:p>
-          <a:p>
-            <a:pPr>
-              <a:spcAft>
-                <a:spcPts val="600"/>
-              </a:spcAft>
-              <a:defRPr sz="1600">
-                <a:solidFill>
-                  <a:srgbClr val="1A1A2E"/>
-                </a:solidFill>
-                <a:latin typeface="Apple SD Gothic Neo"/>
-              </a:defRPr>
-            </a:pPr>
-            <a:r>
-              <a:rPr>
-                <a:ea typeface="Apple SD Gothic Neo"/>
-                <a:latin typeface="Apple SD Gothic Neo"/>
-              </a:rPr>
-              <a:t>• 2024: Chat-based IDE (Cursor, Windsurf) — "edit via conversation"</a:t>
-            </a:r>
-          </a:p>
-          <a:p>
-            <a:pPr>
-              <a:spcAft>
-                <a:spcPts val="600"/>
-              </a:spcAft>
-              <a:defRPr sz="1600">
-                <a:solidFill>
-                  <a:srgbClr val="1A1A2E"/>
-                </a:solidFill>
-                <a:latin typeface="Apple SD Gothic Neo"/>
-              </a:defRPr>
-            </a:pPr>
-            <a:r>
-              <a:rPr>
-                <a:ea typeface="Apple SD Gothic Neo"/>
-                <a:latin typeface="Apple SD Gothic Neo"/>
-              </a:rPr>
-              <a:t>• 2025: CLI Agents (Claude Code, Aider) — "manage projects from terminal"</a:t>
-            </a:r>
-          </a:p>
-          <a:p>
-            <a:pPr>
-              <a:spcAft>
-                <a:spcPts val="600"/>
-              </a:spcAft>
-              <a:defRPr sz="1600">
-                <a:solidFill>
-                  <a:srgbClr val="1A1A2E"/>
-                </a:solidFill>
-                <a:latin typeface="Apple SD Gothic Neo"/>
-              </a:defRPr>
-            </a:pPr>
-            <a:r>
-              <a:rPr>
-                <a:ea typeface="Apple SD Gothic Neo"/>
-                <a:latin typeface="Apple SD Gothic Neo"/>
-              </a:rPr>
-              <a:t>• 2026: Team Agents (Claude Code Teams, n8n) — "multiple agents collaborating"</a:t>
-            </a:r>
-          </a:p>
-          <a:p>
-            <a:pPr>
-              <a:spcAft>
-                <a:spcPts val="600"/>
-              </a:spcAft>
-              <a:defRPr sz="1600">
-                <a:solidFill>
-                  <a:srgbClr val="1A1A2E"/>
-                </a:solidFill>
-                <a:latin typeface="Apple SD Gothic Neo"/>
-              </a:defRPr>
-            </a:pPr>
-            <a:r>
-              <a:rPr>
-                <a:ea typeface="Apple SD Gothic Neo"/>
-                <a:latin typeface="Apple SD Gothic Neo"/>
-              </a:rPr>
-              <a:t>• OpenClaw: 250K+ stars, fastest ever — but 2.74x more security vulnerabilities</a:t>
-            </a:r>
-          </a:p>
-          <a:p>
-            <a:pPr>
-              <a:spcAft>
-                <a:spcPts val="600"/>
-              </a:spcAft>
-              <a:defRPr sz="1600">
-                <a:solidFill>
-                  <a:srgbClr val="1A1A2E"/>
-                </a:solidFill>
-                <a:latin typeface="Apple SD Gothic Neo"/>
-              </a:defRPr>
-            </a:pPr>
-            <a:r>
-              <a:rPr>
-                <a:ea typeface="Apple SD Gothic Neo"/>
-                <a:latin typeface="Apple SD Gothic Neo"/>
-              </a:rPr>
-              <a:t>• Karpathy (2026): "Vibe coding is already behind us. Now it's agentic engineering."</a:t>
-            </a:r>
-          </a:p>
-          <a:p>
-            <a:pPr>
-              <a:spcAft>
-                <a:spcPts val="600"/>
-              </a:spcAft>
-              <a:defRPr sz="1600">
-                <a:solidFill>
-                  <a:srgbClr val="1A1A2E"/>
-                </a:solidFill>
-                <a:latin typeface="Apple SD Gothic Neo"/>
-              </a:defRPr>
-            </a:pPr>
-            <a:r>
-              <a:rPr>
-                <a:ea typeface="Apple SD Gothic Neo"/>
-                <a:latin typeface="Apple SD Gothic Neo"/>
-              </a:rPr>
-              <a:t>• AI writes the code, humans supervise and orchestrate — the new standard</a:t>
+          <p:cNvPr id="6" name="Content Placeholder 5"/>
+          <p:cNvSpPr>
+            <a:spLocks noGrp="1"/>
+          </p:cNvSpPr>
+          <p:nvPr>
+            <p:ph idx="4" sz="quarter"/>
+          </p:nvPr>
+        </p:nvSpPr>
+        <p:spPr/>
+        <p:txBody>
+          <a:bodyPr/>
+          <a:lstStyle/>
+          <a:p>
+            <a:pPr>
+              <a:spcAft>
+                <a:spcPts val="400"/>
+              </a:spcAft>
+            </a:pPr>
+            <a:r>
+              <a:rPr>
+                <a:ea typeface="Apple SD Gothic Neo"/>
+                <a:latin typeface="Apple SD Gothic Neo"/>
+              </a:rPr>
+              <a:t>Long-term Memory — Cross-session persistence</a:t>
+            </a:r>
+          </a:p>
+          <a:p>
+            <a:pPr>
+              <a:spcAft>
+                <a:spcPts val="400"/>
+              </a:spcAft>
+            </a:pPr>
+            <a:r>
+              <a:rPr>
+                <a:ea typeface="Apple SD Gothic Neo"/>
+                <a:latin typeface="Apple SD Gothic Neo"/>
+              </a:rPr>
+              <a:t>Retrieved Information (RAG) — Relevant documents</a:t>
+            </a:r>
+          </a:p>
+          <a:p>
+            <a:pPr>
+              <a:spcAft>
+                <a:spcPts val="400"/>
+              </a:spcAft>
+            </a:pPr>
+            <a:r>
+              <a:rPr>
+                <a:ea typeface="Apple SD Gothic Neo"/>
+                <a:latin typeface="Apple SD Gothic Neo"/>
+              </a:rPr>
+              <a:t>Available Tools — APIs, MCP, functions</a:t>
+            </a:r>
+          </a:p>
+          <a:p>
+            <a:pPr>
+              <a:spcAft>
+                <a:spcPts val="400"/>
+              </a:spcAft>
+            </a:pPr>
+            <a:r>
+              <a:rPr>
+                <a:ea typeface="Apple SD Gothic Neo"/>
+                <a:latin typeface="Apple SD Gothic Neo"/>
+              </a:rPr>
+              <a:t>Output Format — Structured response definitions</a:t>
             </a:r>
           </a:p>
         </p:txBody>
@@ -4878,14 +4606,6 @@
 <file path=ppt/slides/slide7.xml><?xml version="1.0" encoding="utf-8"?>
 <p:sld xmlns:a="http://schemas.openxmlformats.org/drawingml/2006/main" xmlns:p="http://schemas.openxmlformats.org/presentationml/2006/main" xmlns:r="http://schemas.openxmlformats.org/officeDocument/2006/relationships">
   <p:cSld>
-    <p:bg>
-      <p:bgPr>
-        <a:solidFill>
-          <a:srgbClr val="FAFAFC"/>
-        </a:solidFill>
-        <a:effectLst/>
-      </p:bgPr>
-    </p:bg>
     <p:spTree>
       <p:nvGrpSpPr>
         <p:cNvPr id="1" name=""/>
@@ -4907,266 +4627,128 @@
         <p:txBody>
           <a:bodyPr/>
           <a:lstStyle/>
-          <a:p/>
-        </p:txBody>
-      </p:sp>
-      <p:sp>
-        <p:nvSpPr>
-          <p:cNvPr id="3" name="Text Placeholder 2"/>
-          <p:cNvSpPr>
-            <a:spLocks noGrp="1"/>
-          </p:cNvSpPr>
-          <p:nvPr>
-            <p:ph type="body" idx="1"/>
-          </p:nvPr>
-        </p:nvSpPr>
-        <p:spPr/>
-        <p:txBody>
-          <a:bodyPr/>
-          <a:lstStyle/>
-          <a:p/>
-        </p:txBody>
-      </p:sp>
-      <p:sp>
-        <p:nvSpPr>
-          <p:cNvPr id="4" name="Content Placeholder 3"/>
-          <p:cNvSpPr>
-            <a:spLocks noGrp="1"/>
-          </p:cNvSpPr>
-          <p:nvPr>
-            <p:ph idx="2" sz="half"/>
-          </p:nvPr>
-        </p:nvSpPr>
-        <p:spPr/>
-        <p:txBody>
-          <a:bodyPr/>
-          <a:lstStyle/>
-          <a:p/>
-        </p:txBody>
-      </p:sp>
-      <p:sp>
-        <p:nvSpPr>
-          <p:cNvPr id="5" name="Text Placeholder 4"/>
-          <p:cNvSpPr>
-            <a:spLocks noGrp="1"/>
-          </p:cNvSpPr>
-          <p:nvPr>
-            <p:ph type="body" idx="3" sz="quarter"/>
-          </p:nvPr>
-        </p:nvSpPr>
-        <p:spPr/>
-        <p:txBody>
-          <a:bodyPr/>
-          <a:lstStyle/>
-          <a:p/>
-        </p:txBody>
-      </p:sp>
-      <p:sp>
-        <p:nvSpPr>
-          <p:cNvPr id="6" name="Content Placeholder 5"/>
-          <p:cNvSpPr>
-            <a:spLocks noGrp="1"/>
-          </p:cNvSpPr>
-          <p:nvPr>
-            <p:ph idx="4" sz="quarter"/>
-          </p:nvPr>
-        </p:nvSpPr>
-        <p:spPr/>
-        <p:txBody>
-          <a:bodyPr/>
-          <a:lstStyle/>
-          <a:p/>
-        </p:txBody>
-      </p:sp>
-      <p:sp>
-        <p:nvSpPr>
-          <p:cNvPr id="7" name="TextBox 6"/>
-          <p:cNvSpPr txBox="1"/>
-          <p:nvPr/>
-        </p:nvSpPr>
-        <p:spPr>
-          <a:xfrm>
-            <a:off x="457200" y="274320"/>
-            <a:ext cx="10972800" cy="731520"/>
-          </a:xfrm>
-          <a:prstGeom prst="rect">
-            <a:avLst/>
-          </a:prstGeom>
-          <a:noFill/>
-        </p:spPr>
-        <p:txBody>
-          <a:bodyPr wrap="square">
-            <a:spAutoFit/>
-          </a:bodyPr>
-          <a:lstStyle/>
-          <a:p>
-            <a:pPr algn="l">
-              <a:defRPr sz="2800" b="1">
-                <a:solidFill>
-                  <a:srgbClr val="1A1A2E"/>
-                </a:solidFill>
-                <a:latin typeface="Apple SD Gothic Neo"/>
-              </a:defRPr>
-            </a:pPr>
-            <a:r>
-              <a:rPr>
-                <a:ea typeface="Apple SD Gothic Neo"/>
-                <a:latin typeface="Apple SD Gothic Neo"/>
-              </a:rPr>
-              <a:t>Context Engineering: The New Essential Skill</a:t>
-            </a:r>
-          </a:p>
-        </p:txBody>
-      </p:sp>
-      <p:sp>
-        <p:nvSpPr>
-          <p:cNvPr id="8" name="Rectangle 7"/>
-          <p:cNvSpPr/>
-          <p:nvPr/>
-        </p:nvSpPr>
-        <p:spPr>
-          <a:xfrm>
-            <a:off x="457200" y="1371600"/>
-            <a:ext cx="5303520" cy="5029200"/>
-          </a:xfrm>
-          <a:prstGeom prst="rect">
-            <a:avLst/>
-          </a:prstGeom>
-          <a:solidFill>
-            <a:srgbClr val="F0F0F5"/>
-          </a:solidFill>
-          <a:ln>
-            <a:noFill/>
-          </a:ln>
-        </p:spPr>
-        <p:style>
-          <a:lnRef idx="1">
-            <a:schemeClr val="accent1"/>
-          </a:lnRef>
-          <a:fillRef idx="3">
-            <a:schemeClr val="accent1"/>
-          </a:fillRef>
-          <a:effectRef idx="2">
-            <a:schemeClr val="accent1"/>
-          </a:effectRef>
-          <a:fontRef idx="minor">
-            <a:schemeClr val="lt1"/>
-          </a:fontRef>
-        </p:style>
-        <p:txBody>
-          <a:bodyPr rtlCol="0" anchor="ctr"/>
-          <a:lstStyle/>
-          <a:p>
-            <a:pPr algn="ctr"/>
-          </a:p>
-        </p:txBody>
-      </p:sp>
-      <p:sp>
-        <p:nvSpPr>
-          <p:cNvPr id="9" name="TextBox 8"/>
-          <p:cNvSpPr txBox="1"/>
-          <p:nvPr/>
-        </p:nvSpPr>
-        <p:spPr>
-          <a:xfrm>
-            <a:off x="731520" y="1554480"/>
-            <a:ext cx="4754880" cy="548640"/>
-          </a:xfrm>
-          <a:prstGeom prst="rect">
-            <a:avLst/>
-          </a:prstGeom>
-          <a:noFill/>
-        </p:spPr>
-        <p:txBody>
-          <a:bodyPr wrap="square">
-            <a:spAutoFit/>
-          </a:bodyPr>
-          <a:lstStyle/>
-          <a:p>
-            <a:pPr algn="l">
-              <a:defRPr sz="2200" b="1">
-                <a:solidFill>
-                  <a:srgbClr val="0066FF"/>
-                </a:solidFill>
-                <a:latin typeface="Apple SD Gothic Neo"/>
-              </a:defRPr>
-            </a:pPr>
-          </a:p>
-        </p:txBody>
-      </p:sp>
-      <p:sp>
-        <p:nvSpPr>
-          <p:cNvPr id="10" name="Rectangle 9"/>
-          <p:cNvSpPr/>
-          <p:nvPr/>
-        </p:nvSpPr>
-        <p:spPr>
-          <a:xfrm>
-            <a:off x="6217920" y="1371600"/>
-            <a:ext cx="5303520" cy="5029200"/>
-          </a:xfrm>
-          <a:prstGeom prst="rect">
-            <a:avLst/>
-          </a:prstGeom>
-          <a:solidFill>
-            <a:srgbClr val="F0F0F5"/>
-          </a:solidFill>
-          <a:ln>
-            <a:noFill/>
-          </a:ln>
-        </p:spPr>
-        <p:style>
-          <a:lnRef idx="1">
-            <a:schemeClr val="accent1"/>
-          </a:lnRef>
-          <a:fillRef idx="3">
-            <a:schemeClr val="accent1"/>
-          </a:fillRef>
-          <a:effectRef idx="2">
-            <a:schemeClr val="accent1"/>
-          </a:effectRef>
-          <a:fontRef idx="minor">
-            <a:schemeClr val="lt1"/>
-          </a:fontRef>
-        </p:style>
-        <p:txBody>
-          <a:bodyPr rtlCol="0" anchor="ctr"/>
-          <a:lstStyle/>
-          <a:p>
-            <a:pPr algn="ctr"/>
-          </a:p>
-        </p:txBody>
-      </p:sp>
-      <p:sp>
-        <p:nvSpPr>
-          <p:cNvPr id="11" name="TextBox 10"/>
-          <p:cNvSpPr txBox="1"/>
-          <p:nvPr/>
-        </p:nvSpPr>
-        <p:spPr>
-          <a:xfrm>
-            <a:off x="6492240" y="1554480"/>
-            <a:ext cx="4754880" cy="548640"/>
-          </a:xfrm>
-          <a:prstGeom prst="rect">
-            <a:avLst/>
-          </a:prstGeom>
-          <a:noFill/>
-        </p:spPr>
-        <p:txBody>
-          <a:bodyPr wrap="square">
-            <a:spAutoFit/>
-          </a:bodyPr>
-          <a:lstStyle/>
-          <a:p>
-            <a:pPr algn="l">
-              <a:defRPr sz="2200" b="1">
-                <a:solidFill>
-                  <a:srgbClr val="7C3AED"/>
-                </a:solidFill>
-                <a:latin typeface="Apple SD Gothic Neo"/>
-              </a:defRPr>
-            </a:pPr>
+          <a:p>
+            <a:r>
+              <a:rPr>
+                <a:ea typeface="Apple SD Gothic Neo"/>
+                <a:latin typeface="Apple SD Gothic Neo"/>
+              </a:rPr>
+              <a:t>Agentic AI Deep Dive</a:t>
+            </a:r>
+          </a:p>
+        </p:txBody>
+      </p:sp>
+      <p:sp>
+        <p:nvSpPr>
+          <p:cNvPr id="3" name="Content Placeholder 2"/>
+          <p:cNvSpPr>
+            <a:spLocks noGrp="1"/>
+          </p:cNvSpPr>
+          <p:nvPr>
+            <p:ph idx="1"/>
+          </p:nvPr>
+        </p:nvSpPr>
+        <p:spPr/>
+        <p:txBody>
+          <a:bodyPr/>
+          <a:lstStyle/>
+          <a:p>
+            <a:pPr>
+              <a:spcAft>
+                <a:spcPts val="400"/>
+              </a:spcAft>
+            </a:pPr>
+            <a:r>
+              <a:rPr>
+                <a:ea typeface="Apple SD Gothic Neo"/>
+                <a:latin typeface="Apple SD Gothic Neo"/>
+              </a:rPr>
+              <a:t>Generative AI = Chef who gives you the recipe</a:t>
+            </a:r>
+          </a:p>
+          <a:p>
+            <a:pPr>
+              <a:spcAft>
+                <a:spcPts val="400"/>
+              </a:spcAft>
+            </a:pPr>
+            <a:r>
+              <a:rPr>
+                <a:ea typeface="Apple SD Gothic Neo"/>
+                <a:latin typeface="Apple SD Gothic Neo"/>
+              </a:rPr>
+              <a:t>Agentic AI = Chef who shops, cooks, sets the table, and serves</a:t>
+            </a:r>
+          </a:p>
+          <a:p>
+            <a:pPr>
+              <a:spcAft>
+                <a:spcPts val="400"/>
+              </a:spcAft>
+            </a:pPr>
+            <a:r>
+              <a:rPr>
+                <a:ea typeface="Apple SD Gothic Neo"/>
+                <a:latin typeface="Apple SD Gothic Neo"/>
+              </a:rPr>
+              <a:t>Gen 1: Rule-based chatbots (~2022)</a:t>
+            </a:r>
+          </a:p>
+          <a:p>
+            <a:pPr>
+              <a:spcAft>
+                <a:spcPts val="400"/>
+              </a:spcAft>
+            </a:pPr>
+            <a:r>
+              <a:rPr>
+                <a:ea typeface="Apple SD Gothic Neo"/>
+                <a:latin typeface="Apple SD Gothic Neo"/>
+              </a:rPr>
+              <a:t>Gen 2: Generative AI (2023, ChatGPT)</a:t>
+            </a:r>
+          </a:p>
+          <a:p>
+            <a:pPr>
+              <a:spcAft>
+                <a:spcPts val="400"/>
+              </a:spcAft>
+            </a:pPr>
+            <a:r>
+              <a:rPr>
+                <a:ea typeface="Apple SD Gothic Neo"/>
+                <a:latin typeface="Apple SD Gothic Neo"/>
+              </a:rPr>
+              <a:t>Gen 3: Copilots (2024)</a:t>
+            </a:r>
+          </a:p>
+          <a:p>
+            <a:pPr>
+              <a:spcAft>
+                <a:spcPts val="400"/>
+              </a:spcAft>
+            </a:pPr>
+            <a:r>
+              <a:rPr>
+                <a:ea typeface="Apple SD Gothic Neo"/>
+                <a:latin typeface="Apple SD Gothic Neo"/>
+              </a:rPr>
+              <a:t>Gen 4: Single Agents (2025, Claude Code)</a:t>
+            </a:r>
+          </a:p>
+          <a:p>
+            <a:pPr>
+              <a:spcAft>
+                <a:spcPts val="400"/>
+              </a:spcAft>
+            </a:pPr>
+            <a:r>
+              <a:rPr>
+                <a:ea typeface="Apple SD Gothic Neo"/>
+                <a:latin typeface="Apple SD Gothic Neo"/>
+              </a:rPr>
+              <a:t>Gen 5: Multi-Agent Systems (2026, Agent Teams)</a:t>
+            </a:r>
           </a:p>
         </p:txBody>
       </p:sp>
@@ -5181,14 +4763,6 @@
 <file path=ppt/slides/slide8.xml><?xml version="1.0" encoding="utf-8"?>
 <p:sld xmlns:a="http://schemas.openxmlformats.org/drawingml/2006/main" xmlns:p="http://schemas.openxmlformats.org/presentationml/2006/main" xmlns:r="http://schemas.openxmlformats.org/officeDocument/2006/relationships">
   <p:cSld>
-    <p:bg>
-      <p:bgPr>
-        <a:solidFill>
-          <a:srgbClr val="FAFAFC"/>
-        </a:solidFill>
-        <a:effectLst/>
-      </p:bgPr>
-    </p:bg>
     <p:spTree>
       <p:nvGrpSpPr>
         <p:cNvPr id="1" name=""/>
@@ -5210,7 +4784,15 @@
         <p:txBody>
           <a:bodyPr/>
           <a:lstStyle/>
-          <a:p/>
+          <a:p>
+            <a:r>
+              <a:rPr>
+                <a:ea typeface="Apple SD Gothic Neo"/>
+                <a:latin typeface="Apple SD Gothic Neo"/>
+              </a:rPr>
+              <a:t>n8n: Making Agentic AI Real</a:t>
+            </a:r>
+          </a:p>
         </p:txBody>
       </p:sp>
       <p:sp>
@@ -5227,208 +4809,130 @@
         <p:txBody>
           <a:bodyPr/>
           <a:lstStyle/>
-          <a:p/>
-        </p:txBody>
-      </p:sp>
-      <p:sp>
-        <p:nvSpPr>
-          <p:cNvPr id="4" name="TextBox 3"/>
-          <p:cNvSpPr txBox="1"/>
-          <p:nvPr/>
-        </p:nvSpPr>
-        <p:spPr>
-          <a:xfrm>
-            <a:off x="457200" y="274320"/>
-            <a:ext cx="10972800" cy="731520"/>
-          </a:xfrm>
-          <a:prstGeom prst="rect">
-            <a:avLst/>
-          </a:prstGeom>
-          <a:noFill/>
-        </p:spPr>
-        <p:txBody>
-          <a:bodyPr wrap="square">
-            <a:spAutoFit/>
-          </a:bodyPr>
-          <a:lstStyle/>
-          <a:p>
-            <a:pPr algn="l">
-              <a:defRPr sz="2800" b="1">
-                <a:solidFill>
-                  <a:srgbClr val="1A1A2E"/>
-                </a:solidFill>
-                <a:latin typeface="Apple SD Gothic Neo"/>
-              </a:defRPr>
-            </a:pPr>
-            <a:r>
-              <a:rPr>
-                <a:ea typeface="Apple SD Gothic Neo"/>
-                <a:latin typeface="Apple SD Gothic Neo"/>
-              </a:rPr>
-              <a:t>Agentic AI Deep Dive</a:t>
-            </a:r>
-          </a:p>
-        </p:txBody>
-      </p:sp>
-      <p:sp>
-        <p:nvSpPr>
-          <p:cNvPr id="5" name="TextBox 4"/>
-          <p:cNvSpPr txBox="1"/>
-          <p:nvPr/>
-        </p:nvSpPr>
-        <p:spPr>
-          <a:xfrm>
-            <a:off x="731520" y="1371600"/>
-            <a:ext cx="10515600" cy="5029200"/>
-          </a:xfrm>
-          <a:prstGeom prst="rect">
-            <a:avLst/>
-          </a:prstGeom>
-          <a:noFill/>
-        </p:spPr>
-        <p:txBody>
-          <a:bodyPr wrap="square">
-            <a:spAutoFit/>
-          </a:bodyPr>
-          <a:lstStyle/>
-          <a:p>
-            <a:pPr>
-              <a:spcAft>
-                <a:spcPts val="600"/>
-              </a:spcAft>
-              <a:defRPr sz="1600">
-                <a:solidFill>
-                  <a:srgbClr val="1A1A2E"/>
-                </a:solidFill>
-                <a:latin typeface="Apple SD Gothic Neo"/>
-              </a:defRPr>
-            </a:pPr>
-            <a:r>
-              <a:rPr>
-                <a:ea typeface="Apple SD Gothic Neo"/>
-                <a:latin typeface="Apple SD Gothic Neo"/>
-              </a:rPr>
-              <a:t>• Generative AI = Chef who gives you the recipe</a:t>
-            </a:r>
-          </a:p>
-          <a:p>
-            <a:pPr>
-              <a:spcAft>
-                <a:spcPts val="600"/>
-              </a:spcAft>
-              <a:defRPr sz="1600">
-                <a:solidFill>
-                  <a:srgbClr val="1A1A2E"/>
-                </a:solidFill>
-                <a:latin typeface="Apple SD Gothic Neo"/>
-              </a:defRPr>
-            </a:pPr>
-            <a:r>
-              <a:rPr>
-                <a:ea typeface="Apple SD Gothic Neo"/>
-                <a:latin typeface="Apple SD Gothic Neo"/>
-              </a:rPr>
-              <a:t>• Agentic AI = Chef who shops, cooks, sets the table, and serves</a:t>
-            </a:r>
-          </a:p>
-          <a:p>
-            <a:pPr>
-              <a:spcAft>
-                <a:spcPts val="600"/>
-              </a:spcAft>
-              <a:defRPr sz="1600">
-                <a:solidFill>
-                  <a:srgbClr val="1A1A2E"/>
-                </a:solidFill>
-                <a:latin typeface="Apple SD Gothic Neo"/>
-              </a:defRPr>
-            </a:pPr>
-            <a:r>
-              <a:rPr>
-                <a:ea typeface="Apple SD Gothic Neo"/>
-                <a:latin typeface="Apple SD Gothic Neo"/>
-              </a:rPr>
-              <a:t>• Gen 1: Rule-based chatbots (~2022)</a:t>
-            </a:r>
-          </a:p>
-          <a:p>
-            <a:pPr>
-              <a:spcAft>
-                <a:spcPts val="600"/>
-              </a:spcAft>
-              <a:defRPr sz="1600">
-                <a:solidFill>
-                  <a:srgbClr val="1A1A2E"/>
-                </a:solidFill>
-                <a:latin typeface="Apple SD Gothic Neo"/>
-              </a:defRPr>
-            </a:pPr>
-            <a:r>
-              <a:rPr>
-                <a:ea typeface="Apple SD Gothic Neo"/>
-                <a:latin typeface="Apple SD Gothic Neo"/>
-              </a:rPr>
-              <a:t>• Gen 2: Generative AI (2023, ChatGPT)</a:t>
-            </a:r>
-          </a:p>
-          <a:p>
-            <a:pPr>
-              <a:spcAft>
-                <a:spcPts val="600"/>
-              </a:spcAft>
-              <a:defRPr sz="1600">
-                <a:solidFill>
-                  <a:srgbClr val="1A1A2E"/>
-                </a:solidFill>
-                <a:latin typeface="Apple SD Gothic Neo"/>
-              </a:defRPr>
-            </a:pPr>
-            <a:r>
-              <a:rPr>
-                <a:ea typeface="Apple SD Gothic Neo"/>
-                <a:latin typeface="Apple SD Gothic Neo"/>
-              </a:rPr>
-              <a:t>• Gen 3: Copilots (2024)</a:t>
-            </a:r>
-          </a:p>
-          <a:p>
-            <a:pPr>
-              <a:spcAft>
-                <a:spcPts val="600"/>
-              </a:spcAft>
-              <a:defRPr sz="1600">
-                <a:solidFill>
-                  <a:srgbClr val="1A1A2E"/>
-                </a:solidFill>
-                <a:latin typeface="Apple SD Gothic Neo"/>
-              </a:defRPr>
-            </a:pPr>
-            <a:r>
-              <a:rPr>
-                <a:ea typeface="Apple SD Gothic Neo"/>
-                <a:latin typeface="Apple SD Gothic Neo"/>
-              </a:rPr>
-              <a:t>• Gen 4: Single Agents (2025, Claude Code)</a:t>
-            </a:r>
-          </a:p>
-          <a:p>
-            <a:pPr>
-              <a:spcAft>
-                <a:spcPts val="600"/>
-              </a:spcAft>
-              <a:defRPr sz="1600">
-                <a:solidFill>
-                  <a:srgbClr val="1A1A2E"/>
-                </a:solidFill>
-                <a:latin typeface="Apple SD Gothic Neo"/>
-              </a:defRPr>
-            </a:pPr>
-            <a:r>
-              <a:rPr>
-                <a:ea typeface="Apple SD Gothic Neo"/>
-                <a:latin typeface="Apple SD Gothic Neo"/>
-              </a:rPr>
-              <a:t>• Gen 5: Multi-Agent Systems (2026, Agent Teams)</a:t>
+          <a:p>
+            <a:pPr>
+              <a:spcAft>
+                <a:spcPts val="400"/>
+              </a:spcAft>
+            </a:pPr>
+            <a:r>
+              <a:rPr>
+                <a:ea typeface="Apple SD Gothic Neo"/>
+                <a:latin typeface="Apple SD Gothic Neo"/>
+              </a:rPr>
+              <a:t>Autonomy → Trigger-based auto-execution</a:t>
+            </a:r>
+          </a:p>
+          <a:p>
+            <a:pPr>
+              <a:spcAft>
+                <a:spcPts val="400"/>
+              </a:spcAft>
+            </a:pPr>
+            <a:r>
+              <a:rPr>
+                <a:ea typeface="Apple SD Gothic Neo"/>
+                <a:latin typeface="Apple SD Gothic Neo"/>
+              </a:rPr>
+              <a:t>Multi-step Reasoning → AI Agent node with Plan &amp; Execute</a:t>
+            </a:r>
+          </a:p>
+          <a:p>
+            <a:pPr>
+              <a:spcAft>
+                <a:spcPts val="400"/>
+              </a:spcAft>
+            </a:pPr>
+            <a:r>
+              <a:rPr>
+                <a:ea typeface="Apple SD Gothic Neo"/>
+                <a:latin typeface="Apple SD Gothic Neo"/>
+              </a:rPr>
+              <a:t>Tool Use → 500+ integrations + bidirectional MCP</a:t>
+            </a:r>
+          </a:p>
+          <a:p>
+            <a:pPr>
+              <a:spcAft>
+                <a:spcPts val="400"/>
+              </a:spcAft>
+            </a:pPr>
+            <a:r>
+              <a:rPr>
+                <a:ea typeface="Apple SD Gothic Neo"/>
+                <a:latin typeface="Apple SD Gothic Neo"/>
+              </a:rPr>
+              <a:t>Memory → PostgreSQL/Redis memory nodes</a:t>
+            </a:r>
+          </a:p>
+          <a:p>
+            <a:pPr>
+              <a:spcAft>
+                <a:spcPts val="400"/>
+              </a:spcAft>
+            </a:pPr>
+            <a:r>
+              <a:rPr>
+                <a:ea typeface="Apple SD Gothic Neo"/>
+                <a:latin typeface="Apple SD Gothic Neo"/>
+              </a:rPr>
+              <a:t>Adaptability → Conditional branching, error handling, retry logic</a:t>
+            </a:r>
+          </a:p>
+          <a:p>
+            <a:pPr>
+              <a:spcAft>
+                <a:spcPts val="400"/>
+              </a:spcAft>
+            </a:pPr>
+            <a:r>
+              <a:rPr>
+                <a:ea typeface="Apple SD Gothic Neo"/>
+                <a:latin typeface="Apple SD Gothic Neo"/>
+              </a:rPr>
+              <a:t>Mercedes-Benz: MBUX in-vehicle AI agent</a:t>
+            </a:r>
+          </a:p>
+          <a:p>
+            <a:pPr>
+              <a:spcAft>
+                <a:spcPts val="400"/>
+              </a:spcAft>
+            </a:pPr>
+            <a:r>
+              <a:rPr>
+                <a:ea typeface="Apple SD Gothic Neo"/>
+                <a:latin typeface="Apple SD Gothic Neo"/>
+              </a:rPr>
+              <a:t>BMW: Automated dealer support + Neue Klasse AI</a:t>
+            </a:r>
+          </a:p>
+          <a:p>
+            <a:pPr>
+              <a:spcAft>
+                <a:spcPts val="400"/>
+              </a:spcAft>
+            </a:pPr>
+            <a:r>
+              <a:rPr>
+                <a:ea typeface="Apple SD Gothic Neo"/>
+                <a:latin typeface="Apple SD Gothic Neo"/>
+              </a:rPr>
+              <a:t>Delivery Hero: 200 hours saved/month via n8n workflows</a:t>
+            </a:r>
+          </a:p>
+          <a:p>
+            <a:pPr>
+              <a:spcAft>
+                <a:spcPts val="400"/>
+              </a:spcAft>
+            </a:pPr>
+            <a:r>
+              <a:rPr>
+                <a:ea typeface="Apple SD Gothic Neo"/>
+                <a:latin typeface="Apple SD Gothic Neo"/>
+              </a:rPr>
+              <a:t>BeGlobal: 10x scaling, under 1 min per AI-generated proposal</a:t>
             </a:r>
           </a:p>
         </p:txBody>
@@ -5444,14 +4948,6 @@
 <file path=ppt/slides/slide9.xml><?xml version="1.0" encoding="utf-8"?>
 <p:sld xmlns:a="http://schemas.openxmlformats.org/drawingml/2006/main" xmlns:p="http://schemas.openxmlformats.org/presentationml/2006/main" xmlns:r="http://schemas.openxmlformats.org/officeDocument/2006/relationships">
   <p:cSld>
-    <p:bg>
-      <p:bgPr>
-        <a:solidFill>
-          <a:srgbClr val="FAFAFC"/>
-        </a:solidFill>
-        <a:effectLst/>
-      </p:bgPr>
-    </p:bg>
     <p:spTree>
       <p:nvGrpSpPr>
         <p:cNvPr id="1" name=""/>
@@ -5473,265 +4969,65 @@
         <p:txBody>
           <a:bodyPr/>
           <a:lstStyle/>
-          <a:p/>
-        </p:txBody>
-      </p:sp>
-      <p:sp>
-        <p:nvSpPr>
-          <p:cNvPr id="3" name="Content Placeholder 2"/>
-          <p:cNvSpPr>
-            <a:spLocks noGrp="1"/>
-          </p:cNvSpPr>
-          <p:nvPr>
-            <p:ph idx="1"/>
-          </p:nvPr>
-        </p:nvSpPr>
-        <p:spPr/>
-        <p:txBody>
-          <a:bodyPr/>
-          <a:lstStyle/>
-          <a:p/>
-        </p:txBody>
-      </p:sp>
-      <p:sp>
-        <p:nvSpPr>
-          <p:cNvPr id="4" name="TextBox 3"/>
-          <p:cNvSpPr txBox="1"/>
-          <p:nvPr/>
-        </p:nvSpPr>
-        <p:spPr>
-          <a:xfrm>
-            <a:off x="457200" y="274320"/>
-            <a:ext cx="10972800" cy="731520"/>
-          </a:xfrm>
-          <a:prstGeom prst="rect">
-            <a:avLst/>
-          </a:prstGeom>
-          <a:noFill/>
-        </p:spPr>
-        <p:txBody>
-          <a:bodyPr wrap="square">
-            <a:spAutoFit/>
-          </a:bodyPr>
-          <a:lstStyle/>
-          <a:p>
-            <a:pPr algn="l">
-              <a:defRPr sz="2800" b="1">
-                <a:solidFill>
-                  <a:srgbClr val="1A1A2E"/>
-                </a:solidFill>
-                <a:latin typeface="Apple SD Gothic Neo"/>
-              </a:defRPr>
-            </a:pPr>
-            <a:r>
-              <a:rPr>
-                <a:ea typeface="Apple SD Gothic Neo"/>
-                <a:latin typeface="Apple SD Gothic Neo"/>
-              </a:rPr>
-              <a:t>n8n: Making Agentic AI Real</a:t>
-            </a:r>
-          </a:p>
-        </p:txBody>
-      </p:sp>
-      <p:sp>
-        <p:nvSpPr>
-          <p:cNvPr id="5" name="TextBox 4"/>
-          <p:cNvSpPr txBox="1"/>
-          <p:nvPr/>
-        </p:nvSpPr>
-        <p:spPr>
-          <a:xfrm>
-            <a:off x="731520" y="1371600"/>
-            <a:ext cx="10515600" cy="5029200"/>
-          </a:xfrm>
-          <a:prstGeom prst="rect">
-            <a:avLst/>
-          </a:prstGeom>
-          <a:noFill/>
-        </p:spPr>
-        <p:txBody>
-          <a:bodyPr wrap="square">
-            <a:spAutoFit/>
-          </a:bodyPr>
-          <a:lstStyle/>
-          <a:p>
-            <a:pPr>
-              <a:spcAft>
-                <a:spcPts val="600"/>
-              </a:spcAft>
-              <a:defRPr sz="1600">
-                <a:solidFill>
-                  <a:srgbClr val="1A1A2E"/>
-                </a:solidFill>
-                <a:latin typeface="Apple SD Gothic Neo"/>
-              </a:defRPr>
-            </a:pPr>
-            <a:r>
-              <a:rPr>
-                <a:ea typeface="Apple SD Gothic Neo"/>
-                <a:latin typeface="Apple SD Gothic Neo"/>
-              </a:rPr>
-              <a:t>• Autonomy → Trigger-based auto-execution</a:t>
-            </a:r>
-          </a:p>
-          <a:p>
-            <a:pPr>
-              <a:spcAft>
-                <a:spcPts val="600"/>
-              </a:spcAft>
-              <a:defRPr sz="1600">
-                <a:solidFill>
-                  <a:srgbClr val="1A1A2E"/>
-                </a:solidFill>
-                <a:latin typeface="Apple SD Gothic Neo"/>
-              </a:defRPr>
-            </a:pPr>
-            <a:r>
-              <a:rPr>
-                <a:ea typeface="Apple SD Gothic Neo"/>
-                <a:latin typeface="Apple SD Gothic Neo"/>
-              </a:rPr>
-              <a:t>• Multi-step Reasoning → AI Agent node with Plan &amp; Execute</a:t>
-            </a:r>
-          </a:p>
-          <a:p>
-            <a:pPr>
-              <a:spcAft>
-                <a:spcPts val="600"/>
-              </a:spcAft>
-              <a:defRPr sz="1600">
-                <a:solidFill>
-                  <a:srgbClr val="1A1A2E"/>
-                </a:solidFill>
-                <a:latin typeface="Apple SD Gothic Neo"/>
-              </a:defRPr>
-            </a:pPr>
-            <a:r>
-              <a:rPr>
-                <a:ea typeface="Apple SD Gothic Neo"/>
-                <a:latin typeface="Apple SD Gothic Neo"/>
-              </a:rPr>
-              <a:t>• Tool Use → 500+ integrations + bidirectional MCP</a:t>
-            </a:r>
-          </a:p>
-          <a:p>
-            <a:pPr>
-              <a:spcAft>
-                <a:spcPts val="600"/>
-              </a:spcAft>
-              <a:defRPr sz="1600">
-                <a:solidFill>
-                  <a:srgbClr val="1A1A2E"/>
-                </a:solidFill>
-                <a:latin typeface="Apple SD Gothic Neo"/>
-              </a:defRPr>
-            </a:pPr>
-            <a:r>
-              <a:rPr>
-                <a:ea typeface="Apple SD Gothic Neo"/>
-                <a:latin typeface="Apple SD Gothic Neo"/>
-              </a:rPr>
-              <a:t>• Memory → PostgreSQL/Redis memory nodes</a:t>
-            </a:r>
-          </a:p>
-          <a:p>
-            <a:pPr>
-              <a:spcAft>
-                <a:spcPts val="600"/>
-              </a:spcAft>
-              <a:defRPr sz="1600">
-                <a:solidFill>
-                  <a:srgbClr val="1A1A2E"/>
-                </a:solidFill>
-                <a:latin typeface="Apple SD Gothic Neo"/>
-              </a:defRPr>
-            </a:pPr>
-            <a:r>
-              <a:rPr>
-                <a:ea typeface="Apple SD Gothic Neo"/>
-                <a:latin typeface="Apple SD Gothic Neo"/>
-              </a:rPr>
-              <a:t>• Adaptability → Conditional branching, error handling, retry logic</a:t>
-            </a:r>
-          </a:p>
-          <a:p>
-            <a:pPr>
-              <a:spcAft>
-                <a:spcPts val="600"/>
-              </a:spcAft>
-              <a:defRPr sz="1600">
-                <a:solidFill>
-                  <a:srgbClr val="1A1A2E"/>
-                </a:solidFill>
-                <a:latin typeface="Apple SD Gothic Neo"/>
-              </a:defRPr>
-            </a:pPr>
-            <a:r>
-              <a:rPr>
-                <a:ea typeface="Apple SD Gothic Neo"/>
-                <a:latin typeface="Apple SD Gothic Neo"/>
-              </a:rPr>
-              <a:t>• Mercedes-Benz: MBUX in-vehicle AI agent</a:t>
-            </a:r>
-          </a:p>
-          <a:p>
-            <a:pPr>
-              <a:spcAft>
-                <a:spcPts val="600"/>
-              </a:spcAft>
-              <a:defRPr sz="1600">
-                <a:solidFill>
-                  <a:srgbClr val="1A1A2E"/>
-                </a:solidFill>
-                <a:latin typeface="Apple SD Gothic Neo"/>
-              </a:defRPr>
-            </a:pPr>
-            <a:r>
-              <a:rPr>
-                <a:ea typeface="Apple SD Gothic Neo"/>
-                <a:latin typeface="Apple SD Gothic Neo"/>
-              </a:rPr>
-              <a:t>• BMW: Automated dealer support + Neue Klasse AI</a:t>
-            </a:r>
-          </a:p>
-          <a:p>
-            <a:pPr>
-              <a:spcAft>
-                <a:spcPts val="600"/>
-              </a:spcAft>
-              <a:defRPr sz="1600">
-                <a:solidFill>
-                  <a:srgbClr val="1A1A2E"/>
-                </a:solidFill>
-                <a:latin typeface="Apple SD Gothic Neo"/>
-              </a:defRPr>
-            </a:pPr>
-            <a:r>
-              <a:rPr>
-                <a:ea typeface="Apple SD Gothic Neo"/>
-                <a:latin typeface="Apple SD Gothic Neo"/>
-              </a:rPr>
-              <a:t>• Delivery Hero: 200 hours saved/month via n8n workflows</a:t>
-            </a:r>
-          </a:p>
-          <a:p>
-            <a:pPr>
-              <a:spcAft>
-                <a:spcPts val="600"/>
-              </a:spcAft>
-              <a:defRPr sz="1600">
-                <a:solidFill>
-                  <a:srgbClr val="1A1A2E"/>
-                </a:solidFill>
-                <a:latin typeface="Apple SD Gothic Neo"/>
-              </a:defRPr>
-            </a:pPr>
-            <a:r>
-              <a:rPr>
-                <a:ea typeface="Apple SD Gothic Neo"/>
-                <a:latin typeface="Apple SD Gothic Neo"/>
-              </a:rPr>
-              <a:t>• BeGlobal: 10x scaling, under 1 min per AI-generated proposal</a:t>
+          <a:p>
+            <a:r>
+              <a:rPr>
+                <a:ea typeface="Apple SD Gothic Neo"/>
+                <a:latin typeface="Apple SD Gothic Neo"/>
+              </a:rPr>
+              <a:t>Conclusion: What We Can Do Right Now</a:t>
+            </a:r>
+          </a:p>
+        </p:txBody>
+      </p:sp>
+      <p:sp>
+        <p:nvSpPr>
+          <p:cNvPr id="3" name="Text Placeholder 2"/>
+          <p:cNvSpPr>
+            <a:spLocks noGrp="1"/>
+          </p:cNvSpPr>
+          <p:nvPr>
+            <p:ph type="body" idx="1"/>
+          </p:nvPr>
+        </p:nvSpPr>
+        <p:spPr/>
+        <p:txBody>
+          <a:bodyPr/>
+          <a:lstStyle/>
+          <a:p>
+            <a:r>
+              <a:rPr>
+                <a:ea typeface="Apple SD Gothic Neo"/>
+                <a:latin typeface="Apple SD Gothic Neo"/>
+              </a:rPr>
+              <a:t>• Week 1: Install n8n self-hosted, explore workflows</a:t>
+            </a:r>
+          </a:p>
+          <a:p>
+            <a:r>
+              <a:rPr>
+                <a:ea typeface="Apple SD Gothic Neo"/>
+                <a:latin typeface="Apple SD Gothic Neo"/>
+              </a:rPr>
+              <a:t>• Week 2: Build simple automation with AI Agent node</a:t>
+            </a:r>
+          </a:p>
+          <a:p>
+            <a:r>
+              <a:rPr>
+                <a:ea typeface="Apple SD Gothic Neo"/>
+                <a:latin typeface="Apple SD Gothic Neo"/>
+              </a:rPr>
+              <a:t>• Week 3: Convert one real business process to agentic workflow</a:t>
+            </a:r>
+          </a:p>
+          <a:p>
+            <a:r>
+              <a:rPr>
+                <a:ea typeface="Apple SD Gothic Neo"/>
+                <a:latin typeface="Apple SD Gothic Neo"/>
+              </a:rPr>
+              <a:t>• Week 4: Team review — Go / No-Go</a:t>
             </a:r>
           </a:p>
         </p:txBody>

--- a/output/ai-trends-en/report.pptx
+++ b/output/ai-trends-en/report.pptx
@@ -3463,7 +3463,7 @@
           <a:lstStyle/>
           <a:p>
             <a:r>
-              <a:rPr>
+              <a:rPr b="0">
                 <a:ea typeface="Apple SD Gothic Neo"/>
                 <a:latin typeface="Apple SD Gothic Neo"/>
               </a:rPr>
@@ -3488,7 +3488,7 @@
           <a:lstStyle/>
           <a:p>
             <a:r>
-              <a:rPr>
+              <a:rPr b="0">
                 <a:ea typeface="Apple SD Gothic Neo"/>
                 <a:latin typeface="Apple SD Gothic Neo"/>
               </a:rPr>
@@ -3531,7 +3531,7 @@
           <a:lstStyle/>
           <a:p>
             <a:r>
-              <a:rPr>
+              <a:rPr b="0">
                 <a:ea typeface="Apple SD Gothic Neo"/>
                 <a:latin typeface="Apple SD Gothic Neo"/>
               </a:rPr>
@@ -3561,109 +3561,137 @@
               </a:spcAft>
             </a:pPr>
             <a:r>
-              <a:rPr>
-                <a:ea typeface="Apple SD Gothic Neo"/>
-                <a:latin typeface="Apple SD Gothic Neo"/>
-              </a:rPr>
-              <a:t>**The Past Year in Review**</a:t>
-            </a:r>
-          </a:p>
-          <a:p>
-            <a:pPr>
-              <a:spcAft>
-                <a:spcPts val="400"/>
-              </a:spcAft>
-            </a:pPr>
-            <a:r>
-              <a:rPr>
-                <a:ea typeface="Apple SD Gothic Neo"/>
-                <a:latin typeface="Apple SD Gothic Neo"/>
-              </a:rPr>
-              <a:t>**The LLM Race: A Five-Way Battle**</a:t>
-            </a:r>
-          </a:p>
-          <a:p>
-            <a:pPr>
-              <a:spcAft>
-                <a:spcPts val="400"/>
-              </a:spcAft>
-            </a:pPr>
-            <a:r>
-              <a:rPr>
-                <a:ea typeface="Apple SD Gothic Neo"/>
-                <a:latin typeface="Apple SD Gothic Neo"/>
-              </a:rPr>
-              <a:t>**MCP: Rise, Limits, and the Native AI Era**</a:t>
-            </a:r>
-          </a:p>
-          <a:p>
-            <a:pPr>
-              <a:spcAft>
-                <a:spcPts val="400"/>
-              </a:spcAft>
-            </a:pPr>
-            <a:r>
-              <a:rPr>
-                <a:ea typeface="Apple SD Gothic Neo"/>
-                <a:latin typeface="Apple SD Gothic Neo"/>
-              </a:rPr>
-              <a:t>**From Vibe Coding to Agentic Engineering**</a:t>
-            </a:r>
-          </a:p>
-          <a:p>
-            <a:pPr>
-              <a:spcAft>
-                <a:spcPts val="400"/>
-              </a:spcAft>
-            </a:pPr>
-            <a:r>
-              <a:rPr>
-                <a:ea typeface="Apple SD Gothic Neo"/>
-                <a:latin typeface="Apple SD Gothic Neo"/>
-              </a:rPr>
-              <a:t>**Context Engineering: The New Essential Skill**</a:t>
-            </a:r>
-          </a:p>
-          <a:p>
-            <a:pPr>
-              <a:spcAft>
-                <a:spcPts val="400"/>
-              </a:spcAft>
-            </a:pPr>
-            <a:r>
-              <a:rPr>
-                <a:ea typeface="Apple SD Gothic Neo"/>
-                <a:latin typeface="Apple SD Gothic Neo"/>
-              </a:rPr>
-              <a:t>**Agentic AI Deep Dive**</a:t>
-            </a:r>
-          </a:p>
-          <a:p>
-            <a:pPr>
-              <a:spcAft>
-                <a:spcPts val="400"/>
-              </a:spcAft>
-            </a:pPr>
-            <a:r>
-              <a:rPr>
-                <a:ea typeface="Apple SD Gothic Neo"/>
-                <a:latin typeface="Apple SD Gothic Neo"/>
-              </a:rPr>
-              <a:t>**n8n: Making Agentic AI Real**</a:t>
-            </a:r>
-          </a:p>
-          <a:p>
-            <a:pPr>
-              <a:spcAft>
-                <a:spcPts val="400"/>
-              </a:spcAft>
-            </a:pPr>
-            <a:r>
-              <a:rPr>
-                <a:ea typeface="Apple SD Gothic Neo"/>
-                <a:latin typeface="Apple SD Gothic Neo"/>
-              </a:rPr>
-              <a:t>**Conclusion: What We Can Do Right Now**</a:t>
+              <a:rPr b="0">
+                <a:ea typeface="Apple SD Gothic Neo"/>
+                <a:latin typeface="Apple SD Gothic Neo"/>
+              </a:rPr>
+              <a:t>본 보고서에서는 </a:t>
+            </a:r>
+            <a:r>
+              <a:rPr b="1">
+                <a:ea typeface="Apple SD Gothic Neo"/>
+                <a:latin typeface="Apple SD Gothic Neo"/>
+              </a:rPr>
+              <a:t>AI Trends 2025-2026: The Age of Agentic AI</a:t>
+            </a:r>
+            <a:r>
+              <a:rPr b="0">
+                <a:ea typeface="Apple SD Gothic Neo"/>
+                <a:latin typeface="Apple SD Gothic Neo"/>
+              </a:rPr>
+              <a:t>에 대해 8개 섹션으로 나누어 분석하였습니다.</a:t>
+            </a:r>
+          </a:p>
+          <a:p>
+            <a:pPr>
+              <a:spcAft>
+                <a:spcPts val="400"/>
+              </a:spcAft>
+            </a:pPr>
+            <a:r>
+              <a:rPr b="1">
+                <a:ea typeface="Apple SD Gothic Neo"/>
+                <a:latin typeface="Apple SD Gothic Neo"/>
+              </a:rPr>
+              <a:t>The Past Year in Review</a:t>
+            </a:r>
+          </a:p>
+          <a:p>
+            <a:pPr>
+              <a:spcAft>
+                <a:spcPts val="400"/>
+              </a:spcAft>
+            </a:pPr>
+            <a:r>
+              <a:rPr b="1">
+                <a:ea typeface="Apple SD Gothic Neo"/>
+                <a:latin typeface="Apple SD Gothic Neo"/>
+              </a:rPr>
+              <a:t>The LLM Race: A Five-Way Battle</a:t>
+            </a:r>
+          </a:p>
+          <a:p>
+            <a:pPr>
+              <a:spcAft>
+                <a:spcPts val="400"/>
+              </a:spcAft>
+            </a:pPr>
+            <a:r>
+              <a:rPr b="1">
+                <a:ea typeface="Apple SD Gothic Neo"/>
+                <a:latin typeface="Apple SD Gothic Neo"/>
+              </a:rPr>
+              <a:t>MCP: Rise, Limits, and the Native AI Era</a:t>
+            </a:r>
+          </a:p>
+          <a:p>
+            <a:pPr>
+              <a:spcAft>
+                <a:spcPts val="400"/>
+              </a:spcAft>
+            </a:pPr>
+            <a:r>
+              <a:rPr b="1">
+                <a:ea typeface="Apple SD Gothic Neo"/>
+                <a:latin typeface="Apple SD Gothic Neo"/>
+              </a:rPr>
+              <a:t>From Vibe Coding to Agentic Engineering</a:t>
+            </a:r>
+          </a:p>
+          <a:p>
+            <a:pPr>
+              <a:spcAft>
+                <a:spcPts val="400"/>
+              </a:spcAft>
+            </a:pPr>
+            <a:r>
+              <a:rPr b="1">
+                <a:ea typeface="Apple SD Gothic Neo"/>
+                <a:latin typeface="Apple SD Gothic Neo"/>
+              </a:rPr>
+              <a:t>Context Engineering: The New Essential Skill</a:t>
+            </a:r>
+          </a:p>
+          <a:p>
+            <a:pPr>
+              <a:spcAft>
+                <a:spcPts val="400"/>
+              </a:spcAft>
+            </a:pPr>
+            <a:r>
+              <a:rPr b="1">
+                <a:ea typeface="Apple SD Gothic Neo"/>
+                <a:latin typeface="Apple SD Gothic Neo"/>
+              </a:rPr>
+              <a:t>Agentic AI Deep Dive</a:t>
+            </a:r>
+          </a:p>
+          <a:p>
+            <a:pPr>
+              <a:spcAft>
+                <a:spcPts val="400"/>
+              </a:spcAft>
+            </a:pPr>
+            <a:r>
+              <a:rPr b="1">
+                <a:ea typeface="Apple SD Gothic Neo"/>
+                <a:latin typeface="Apple SD Gothic Neo"/>
+              </a:rPr>
+              <a:t>n8n: Making Agentic AI Real</a:t>
+            </a:r>
+          </a:p>
+          <a:p>
+            <a:pPr>
+              <a:spcAft>
+                <a:spcPts val="400"/>
+              </a:spcAft>
+            </a:pPr>
+            <a:r>
+              <a:rPr b="1">
+                <a:ea typeface="Apple SD Gothic Neo"/>
+                <a:latin typeface="Apple SD Gothic Neo"/>
+              </a:rPr>
+              <a:t>Conclusion: What We Can Do Right Now</a:t>
             </a:r>
           </a:p>
         </p:txBody>
@@ -3702,7 +3730,7 @@
           <a:lstStyle/>
           <a:p>
             <a:r>
-              <a:rPr>
+              <a:rPr b="0">
                 <a:ea typeface="Apple SD Gothic Neo"/>
                 <a:latin typeface="Apple SD Gothic Neo"/>
               </a:rPr>
@@ -3732,137 +3760,228 @@
               </a:spcAft>
             </a:pPr>
             <a:r>
-              <a:rPr>
-                <a:ea typeface="Apple SD Gothic Neo"/>
-                <a:latin typeface="Apple SD Gothic Neo"/>
-              </a:rPr>
-              <a:t>**2024.11** MCP announced (Anthropic) — AI-to-tool connectivity standard emerges</a:t>
-            </a:r>
-          </a:p>
-          <a:p>
-            <a:pPr>
-              <a:spcAft>
-                <a:spcPts val="400"/>
-              </a:spcAft>
-            </a:pPr>
-            <a:r>
-              <a:rPr>
-                <a:ea typeface="Apple SD Gothic Neo"/>
-                <a:latin typeface="Apple SD Gothic Neo"/>
-              </a:rPr>
-              <a:t>**2025.01** DeepSeek R1 released — open-source shockwave, price war begins</a:t>
-            </a:r>
-          </a:p>
-          <a:p>
-            <a:pPr>
-              <a:spcAft>
-                <a:spcPts val="400"/>
-              </a:spcAft>
-            </a:pPr>
-            <a:r>
-              <a:rPr>
-                <a:ea typeface="Apple SD Gothic Neo"/>
-                <a:latin typeface="Apple SD Gothic Neo"/>
-              </a:rPr>
-              <a:t>**2025.02** "Vibe Coding" coined (Karpathy) — writing code without reading it</a:t>
-            </a:r>
-          </a:p>
-          <a:p>
-            <a:pPr>
-              <a:spcAft>
-                <a:spcPts val="400"/>
-              </a:spcAft>
-            </a:pPr>
-            <a:r>
-              <a:rPr>
-                <a:ea typeface="Apple SD Gothic Neo"/>
-                <a:latin typeface="Apple SD Gothic Neo"/>
-              </a:rPr>
-              <a:t>**2025.03** OpenAI Agents SDK — agent framework competition heats up</a:t>
-            </a:r>
-          </a:p>
-          <a:p>
-            <a:pPr>
-              <a:spcAft>
-                <a:spcPts val="400"/>
-              </a:spcAft>
-            </a:pPr>
-            <a:r>
-              <a:rPr>
-                <a:ea typeface="Apple SD Gothic Neo"/>
-                <a:latin typeface="Apple SD Gothic Neo"/>
-              </a:rPr>
-              <a:t>**2025.05** Claude Code launched — CLI-based AI agents begin</a:t>
-            </a:r>
-          </a:p>
-          <a:p>
-            <a:pPr>
-              <a:spcAft>
-                <a:spcPts val="400"/>
-              </a:spcAft>
-            </a:pPr>
-            <a:r>
-              <a:rPr>
-                <a:ea typeface="Apple SD Gothic Neo"/>
-                <a:latin typeface="Apple SD Gothic Neo"/>
-              </a:rPr>
-              <a:t>**2025.09** Notion 3.0 AI Agents — services embed their own AI agents</a:t>
-            </a:r>
-          </a:p>
-          <a:p>
-            <a:pPr>
-              <a:spcAft>
-                <a:spcPts val="400"/>
-              </a:spcAft>
-            </a:pPr>
-            <a:r>
-              <a:rPr>
-                <a:ea typeface="Apple SD Gothic Neo"/>
-                <a:latin typeface="Apple SD Gothic Neo"/>
-              </a:rPr>
-              <a:t>**2025.10** n8n Series C $180M (Nvidia) — massive bet on workflow + AI</a:t>
-            </a:r>
-          </a:p>
-          <a:p>
-            <a:pPr>
-              <a:spcAft>
-                <a:spcPts val="400"/>
-              </a:spcAft>
-            </a:pPr>
-            <a:r>
-              <a:rPr>
-                <a:ea typeface="Apple SD Gothic Neo"/>
-                <a:latin typeface="Apple SD Gothic Neo"/>
-              </a:rPr>
-              <a:t>**2025.12** MCP → Linux Foundation — standard established, industry moves on</a:t>
-            </a:r>
-          </a:p>
-          <a:p>
-            <a:pPr>
-              <a:spcAft>
-                <a:spcPts val="400"/>
-              </a:spcAft>
-            </a:pPr>
-            <a:r>
-              <a:rPr>
-                <a:ea typeface="Apple SD Gothic Neo"/>
-                <a:latin typeface="Apple SD Gothic Neo"/>
-              </a:rPr>
-              <a:t>**2026.01** OpenClaw viral (250K stars) — peak and controversy of vibe coding</a:t>
-            </a:r>
-          </a:p>
-          <a:p>
-            <a:pPr>
-              <a:spcAft>
-                <a:spcPts val="400"/>
-              </a:spcAft>
-            </a:pPr>
-            <a:r>
-              <a:rPr>
-                <a:ea typeface="Apple SD Gothic Neo"/>
-                <a:latin typeface="Apple SD Gothic Neo"/>
-              </a:rPr>
-              <a:t>**2026.02** Claude 4.6 / Karpathy: "Vibe coding is behind us" — agentic engineering era</a:t>
+              <a:rPr b="1">
+                <a:ea typeface="Apple SD Gothic Neo"/>
+                <a:latin typeface="Apple SD Gothic Neo"/>
+              </a:rPr>
+              <a:t>2024.11</a:t>
+            </a:r>
+            <a:r>
+              <a:rPr b="0">
+                <a:ea typeface="Apple SD Gothic Neo"/>
+                <a:latin typeface="Apple SD Gothic Neo"/>
+              </a:rPr>
+              <a:t> MCP announced (Anthropic) — AI-to-tool connectivity standard emerges</a:t>
+            </a:r>
+          </a:p>
+          <a:p>
+            <a:pPr>
+              <a:spcAft>
+                <a:spcPts val="400"/>
+              </a:spcAft>
+            </a:pPr>
+            <a:r>
+              <a:rPr b="1">
+                <a:ea typeface="Apple SD Gothic Neo"/>
+                <a:latin typeface="Apple SD Gothic Neo"/>
+              </a:rPr>
+              <a:t>2025.01</a:t>
+            </a:r>
+            <a:r>
+              <a:rPr b="0">
+                <a:ea typeface="Apple SD Gothic Neo"/>
+                <a:latin typeface="Apple SD Gothic Neo"/>
+              </a:rPr>
+              <a:t> DeepSeek R1 released — open-source shockwave, price war begins</a:t>
+            </a:r>
+          </a:p>
+          <a:p>
+            <a:pPr>
+              <a:spcAft>
+                <a:spcPts val="400"/>
+              </a:spcAft>
+            </a:pPr>
+            <a:r>
+              <a:rPr b="1">
+                <a:ea typeface="Apple SD Gothic Neo"/>
+                <a:latin typeface="Apple SD Gothic Neo"/>
+              </a:rPr>
+              <a:t>2025.02</a:t>
+            </a:r>
+            <a:r>
+              <a:rPr b="0">
+                <a:ea typeface="Apple SD Gothic Neo"/>
+                <a:latin typeface="Apple SD Gothic Neo"/>
+              </a:rPr>
+              <a:t> "Vibe Coding" coined (Karpathy) — writing code without reading it</a:t>
+            </a:r>
+          </a:p>
+          <a:p>
+            <a:pPr>
+              <a:spcAft>
+                <a:spcPts val="400"/>
+              </a:spcAft>
+            </a:pPr>
+            <a:r>
+              <a:rPr b="1">
+                <a:ea typeface="Apple SD Gothic Neo"/>
+                <a:latin typeface="Apple SD Gothic Neo"/>
+              </a:rPr>
+              <a:t>2025.03</a:t>
+            </a:r>
+            <a:r>
+              <a:rPr b="0">
+                <a:ea typeface="Apple SD Gothic Neo"/>
+                <a:latin typeface="Apple SD Gothic Neo"/>
+              </a:rPr>
+              <a:t> OpenAI Agents SDK — agent framework competition heats up</a:t>
+            </a:r>
+          </a:p>
+          <a:p>
+            <a:pPr>
+              <a:spcAft>
+                <a:spcPts val="400"/>
+              </a:spcAft>
+            </a:pPr>
+            <a:r>
+              <a:rPr b="1">
+                <a:ea typeface="Apple SD Gothic Neo"/>
+                <a:latin typeface="Apple SD Gothic Neo"/>
+              </a:rPr>
+              <a:t>2025.05</a:t>
+            </a:r>
+            <a:r>
+              <a:rPr b="0">
+                <a:ea typeface="Apple SD Gothic Neo"/>
+                <a:latin typeface="Apple SD Gothic Neo"/>
+              </a:rPr>
+              <a:t> Claude Code launched — CLI-based AI agents begin</a:t>
+            </a:r>
+          </a:p>
+          <a:p>
+            <a:pPr>
+              <a:spcAft>
+                <a:spcPts val="400"/>
+              </a:spcAft>
+            </a:pPr>
+            <a:r>
+              <a:rPr b="1">
+                <a:ea typeface="Apple SD Gothic Neo"/>
+                <a:latin typeface="Apple SD Gothic Neo"/>
+              </a:rPr>
+              <a:t>2025.09</a:t>
+            </a:r>
+            <a:r>
+              <a:rPr b="0">
+                <a:ea typeface="Apple SD Gothic Neo"/>
+                <a:latin typeface="Apple SD Gothic Neo"/>
+              </a:rPr>
+              <a:t> Notion 3.0 AI Agents — services embed their own AI agents</a:t>
+            </a:r>
+          </a:p>
+          <a:p>
+            <a:pPr>
+              <a:spcAft>
+                <a:spcPts val="400"/>
+              </a:spcAft>
+            </a:pPr>
+            <a:r>
+              <a:rPr b="1">
+                <a:ea typeface="Apple SD Gothic Neo"/>
+                <a:latin typeface="Apple SD Gothic Neo"/>
+              </a:rPr>
+              <a:t>2025.10</a:t>
+            </a:r>
+            <a:r>
+              <a:rPr b="0">
+                <a:ea typeface="Apple SD Gothic Neo"/>
+                <a:latin typeface="Apple SD Gothic Neo"/>
+              </a:rPr>
+              <a:t> n8n Series C $180M (Nvidia) — massive bet on workflow + AI</a:t>
+            </a:r>
+          </a:p>
+          <a:p>
+            <a:pPr>
+              <a:spcAft>
+                <a:spcPts val="400"/>
+              </a:spcAft>
+            </a:pPr>
+            <a:r>
+              <a:rPr b="1">
+                <a:ea typeface="Apple SD Gothic Neo"/>
+                <a:latin typeface="Apple SD Gothic Neo"/>
+              </a:rPr>
+              <a:t>2025.12</a:t>
+            </a:r>
+            <a:r>
+              <a:rPr b="0">
+                <a:ea typeface="Apple SD Gothic Neo"/>
+                <a:latin typeface="Apple SD Gothic Neo"/>
+              </a:rPr>
+              <a:t> MCP → Linux Foundation — standard established, industry moves on</a:t>
+            </a:r>
+          </a:p>
+          <a:p>
+            <a:pPr>
+              <a:spcAft>
+                <a:spcPts val="400"/>
+              </a:spcAft>
+            </a:pPr>
+            <a:r>
+              <a:rPr b="1">
+                <a:ea typeface="Apple SD Gothic Neo"/>
+                <a:latin typeface="Apple SD Gothic Neo"/>
+              </a:rPr>
+              <a:t>2026.01</a:t>
+            </a:r>
+            <a:r>
+              <a:rPr b="0">
+                <a:ea typeface="Apple SD Gothic Neo"/>
+                <a:latin typeface="Apple SD Gothic Neo"/>
+              </a:rPr>
+              <a:t> OpenClaw viral (250K stars) — peak and controversy of vibe coding</a:t>
+            </a:r>
+          </a:p>
+          <a:p>
+            <a:pPr>
+              <a:spcAft>
+                <a:spcPts val="400"/>
+              </a:spcAft>
+            </a:pPr>
+            <a:r>
+              <a:rPr b="1">
+                <a:ea typeface="Apple SD Gothic Neo"/>
+                <a:latin typeface="Apple SD Gothic Neo"/>
+              </a:rPr>
+              <a:t>2026.02</a:t>
+            </a:r>
+            <a:r>
+              <a:rPr b="0">
+                <a:ea typeface="Apple SD Gothic Neo"/>
+                <a:latin typeface="Apple SD Gothic Neo"/>
+              </a:rPr>
+              <a:t> Claude 4.6 / Karpathy: "Vibe coding is behind us" — agentic engineering era</a:t>
+            </a:r>
+          </a:p>
+          <a:p>
+            <a:pPr>
+              <a:spcAft>
+                <a:spcPts val="400"/>
+              </a:spcAft>
+            </a:pPr>
+            <a:r>
+              <a:rPr b="1">
+                <a:ea typeface="Apple SD Gothic Neo"/>
+                <a:latin typeface="Apple SD Gothic Neo"/>
+              </a:rPr>
+              <a:t>In one line:</a:t>
+            </a:r>
+            <a:r>
+              <a:rPr b="0">
+                <a:ea typeface="Apple SD Gothic Neo"/>
+                <a:latin typeface="Apple SD Gothic Neo"/>
+              </a:rPr>
+              <a:t> AI evolves from "conversation tool" → "working agent" → "a team that runs systems."</a:t>
             </a:r>
           </a:p>
         </p:txBody>
@@ -3901,7 +4020,7 @@
           <a:lstStyle/>
           <a:p>
             <a:r>
-              <a:rPr>
+              <a:rPr b="0">
                 <a:ea typeface="Apple SD Gothic Neo"/>
                 <a:latin typeface="Apple SD Gothic Neo"/>
               </a:rPr>
@@ -3924,7 +4043,15 @@
         <p:txBody>
           <a:bodyPr/>
           <a:lstStyle/>
-          <a:p/>
+          <a:p>
+            <a:r>
+              <a:rPr b="0">
+                <a:ea typeface="Apple SD Gothic Neo"/>
+                <a:latin typeface="Apple SD Gothic Neo"/>
+              </a:rPr>
+              <a:t/>
+            </a:r>
+          </a:p>
         </p:txBody>
       </p:sp>
       <p:sp>
@@ -3948,53 +4075,95 @@
               </a:spcAft>
             </a:pPr>
             <a:r>
-              <a:rPr>
-                <a:ea typeface="Apple SD Gothic Neo"/>
-                <a:latin typeface="Apple SD Gothic Neo"/>
-              </a:rPr>
-              <a:t>**OpenAI** — GPT-4.1, o3, o4-mini: Reasoning-focused, 1M tokens, price competitive</a:t>
-            </a:r>
-          </a:p>
-          <a:p>
-            <a:pPr>
-              <a:spcAft>
-                <a:spcPts val="400"/>
-              </a:spcAft>
-            </a:pPr>
-            <a:r>
-              <a:rPr>
-                <a:ea typeface="Apple SD Gothic Neo"/>
-                <a:latin typeface="Apple SD Gothic Neo"/>
-              </a:rPr>
-              <a:t>**Anthropic** — Claude Sonnet/Opus 4.6: #1 coding, 30h+ autonomous tasks, agent teams</a:t>
-            </a:r>
-          </a:p>
-          <a:p>
-            <a:pPr>
-              <a:spcAft>
-                <a:spcPts val="400"/>
-              </a:spcAft>
-            </a:pPr>
-            <a:r>
-              <a:rPr>
-                <a:ea typeface="Apple SD Gothic Neo"/>
-                <a:latin typeface="Apple SD Gothic Neo"/>
-              </a:rPr>
-              <a:t>**Google** — Gemini 2.5 Pro: 1M tokens, Deep Think mode, top math/coding</a:t>
-            </a:r>
-          </a:p>
-          <a:p>
-            <a:pPr>
-              <a:spcAft>
-                <a:spcPts val="400"/>
-              </a:spcAft>
-            </a:pPr>
-            <a:r>
-              <a:rPr>
-                <a:ea typeface="Apple SD Gothic Neo"/>
-                <a:latin typeface="Apple SD Gothic Neo"/>
-              </a:rPr>
-              <a:t>**Open Source** — DeepSeek R1, Llama 4 Scout (10M tokens): Price disruption + rapid catch-up</a:t>
+              <a:rPr b="1">
+                <a:ea typeface="Apple SD Gothic Neo"/>
+                <a:latin typeface="Apple SD Gothic Neo"/>
+              </a:rPr>
+              <a:t>The Big 5:</a:t>
+            </a:r>
+          </a:p>
+          <a:p>
+            <a:pPr>
+              <a:spcAft>
+                <a:spcPts val="400"/>
+              </a:spcAft>
+            </a:pPr>
+            <a:r>
+              <a:rPr b="1">
+                <a:ea typeface="Apple SD Gothic Neo"/>
+                <a:latin typeface="Apple SD Gothic Neo"/>
+              </a:rPr>
+              <a:t>OpenAI</a:t>
+            </a:r>
+            <a:r>
+              <a:rPr b="0">
+                <a:ea typeface="Apple SD Gothic Neo"/>
+                <a:latin typeface="Apple SD Gothic Neo"/>
+              </a:rPr>
+              <a:t> — GPT-4.1, o3, o4-mini: Reasoning-focused, 1M tokens, price competitive</a:t>
+            </a:r>
+          </a:p>
+          <a:p>
+            <a:pPr>
+              <a:spcAft>
+                <a:spcPts val="400"/>
+              </a:spcAft>
+            </a:pPr>
+            <a:r>
+              <a:rPr b="1">
+                <a:ea typeface="Apple SD Gothic Neo"/>
+                <a:latin typeface="Apple SD Gothic Neo"/>
+              </a:rPr>
+              <a:t>Anthropic</a:t>
+            </a:r>
+            <a:r>
+              <a:rPr b="0">
+                <a:ea typeface="Apple SD Gothic Neo"/>
+                <a:latin typeface="Apple SD Gothic Neo"/>
+              </a:rPr>
+              <a:t> — Claude Sonnet/Opus 4.6: #1 coding, 30h+ autonomous tasks, agent teams</a:t>
+            </a:r>
+          </a:p>
+          <a:p>
+            <a:pPr>
+              <a:spcAft>
+                <a:spcPts val="400"/>
+              </a:spcAft>
+            </a:pPr>
+            <a:r>
+              <a:rPr b="1">
+                <a:ea typeface="Apple SD Gothic Neo"/>
+                <a:latin typeface="Apple SD Gothic Neo"/>
+              </a:rPr>
+              <a:t>Google</a:t>
+            </a:r>
+            <a:r>
+              <a:rPr b="0">
+                <a:ea typeface="Apple SD Gothic Neo"/>
+                <a:latin typeface="Apple SD Gothic Neo"/>
+              </a:rPr>
+              <a:t> — Gemini 2.5 Pro: 1M tokens, Deep Think mode, top math/coding</a:t>
+            </a:r>
+          </a:p>
+          <a:p>
+            <a:pPr>
+              <a:spcAft>
+                <a:spcPts val="400"/>
+              </a:spcAft>
+            </a:pPr>
+            <a:r>
+              <a:rPr b="1">
+                <a:ea typeface="Apple SD Gothic Neo"/>
+                <a:latin typeface="Apple SD Gothic Neo"/>
+              </a:rPr>
+              <a:t>Open Source</a:t>
+            </a:r>
+            <a:r>
+              <a:rPr b="0">
+                <a:ea typeface="Apple SD Gothic Neo"/>
+                <a:latin typeface="Apple SD Gothic Neo"/>
+              </a:rPr>
+              <a:t> — DeepSeek R1, Llama 4 Scout (10M tokens): Price disruption + rapid catch-up</a:t>
             </a:r>
           </a:p>
         </p:txBody>
@@ -4013,7 +4182,15 @@
         <p:txBody>
           <a:bodyPr/>
           <a:lstStyle/>
-          <a:p/>
+          <a:p>
+            <a:r>
+              <a:rPr b="0">
+                <a:ea typeface="Apple SD Gothic Neo"/>
+                <a:latin typeface="Apple SD Gothic Neo"/>
+              </a:rPr>
+              <a:t/>
+            </a:r>
+          </a:p>
         </p:txBody>
       </p:sp>
       <p:sp>
@@ -4037,21 +4214,42 @@
               </a:spcAft>
             </a:pPr>
             <a:r>
-              <a:rPr>
-                <a:ea typeface="Apple SD Gothic Neo"/>
-                <a:latin typeface="Apple SD Gothic Neo"/>
-              </a:rPr>
-              <a:t>**Challengers** — xAI Grok 3, Mistral: 200K GPU infra, EU data sovereignty</a:t>
-            </a:r>
-          </a:p>
-          <a:p>
-            <a:pPr>
-              <a:spcAft>
-                <a:spcPts val="400"/>
-              </a:spcAft>
-            </a:pPr>
-            <a:r>
-              <a:rPr>
+              <a:rPr b="1">
+                <a:ea typeface="Apple SD Gothic Neo"/>
+                <a:latin typeface="Apple SD Gothic Neo"/>
+              </a:rPr>
+              <a:t>Challengers</a:t>
+            </a:r>
+            <a:r>
+              <a:rPr b="0">
+                <a:ea typeface="Apple SD Gothic Neo"/>
+                <a:latin typeface="Apple SD Gothic Neo"/>
+              </a:rPr>
+              <a:t> — xAI Grok 3, Mistral: 200K GPU infra, EU data sovereignty</a:t>
+            </a:r>
+          </a:p>
+          <a:p>
+            <a:pPr>
+              <a:spcAft>
+                <a:spcPts val="400"/>
+              </a:spcAft>
+            </a:pPr>
+            <a:r>
+              <a:rPr b="1">
+                <a:ea typeface="Apple SD Gothic Neo"/>
+                <a:latin typeface="Apple SD Gothic Neo"/>
+              </a:rPr>
+              <a:t>How competition shifted:</a:t>
+            </a:r>
+          </a:p>
+          <a:p>
+            <a:pPr>
+              <a:spcAft>
+                <a:spcPts val="400"/>
+              </a:spcAft>
+            </a:pPr>
+            <a:r>
+              <a:rPr b="0">
                 <a:ea typeface="Apple SD Gothic Neo"/>
                 <a:latin typeface="Apple SD Gothic Neo"/>
               </a:rPr>
@@ -4065,7 +4263,7 @@
               </a:spcAft>
             </a:pPr>
             <a:r>
-              <a:rPr>
+              <a:rPr b="0">
                 <a:ea typeface="Apple SD Gothic Neo"/>
                 <a:latin typeface="Apple SD Gothic Neo"/>
               </a:rPr>
@@ -4079,11 +4277,25 @@
               </a:spcAft>
             </a:pPr>
             <a:r>
-              <a:rPr>
+              <a:rPr b="0">
                 <a:ea typeface="Apple SD Gothic Neo"/>
                 <a:latin typeface="Apple SD Gothic Neo"/>
               </a:rPr>
               <a:t>2026: How well can it orchestrate agent teams?</a:t>
+            </a:r>
+          </a:p>
+          <a:p>
+            <a:pPr>
+              <a:spcAft>
+                <a:spcPts val="400"/>
+              </a:spcAft>
+            </a:pPr>
+            <a:r>
+              <a:rPr b="0">
+                <a:ea typeface="Apple SD Gothic Neo"/>
+                <a:latin typeface="Apple SD Gothic Neo"/>
+              </a:rPr>
+              <a:t>Every model now ships with reasoning mode. Agent capability is the new metric. Prices dropping across the board.</a:t>
             </a:r>
           </a:p>
         </p:txBody>
@@ -4122,7 +4334,7 @@
           <a:lstStyle/>
           <a:p>
             <a:r>
-              <a:rPr>
+              <a:rPr b="0">
                 <a:ea typeface="Apple SD Gothic Neo"/>
                 <a:latin typeface="Apple SD Gothic Neo"/>
               </a:rPr>
@@ -4152,7 +4364,91 @@
               </a:spcAft>
             </a:pPr>
             <a:r>
-              <a:rPr>
+              <a:rPr b="1">
+                <a:ea typeface="Apple SD Gothic Neo"/>
+                <a:latin typeface="Apple SD Gothic Neo"/>
+              </a:rPr>
+              <a:t>Model Context Protocol</a:t>
+            </a:r>
+            <a:r>
+              <a:rPr b="0">
+                <a:ea typeface="Apple SD Gothic Neo"/>
+                <a:latin typeface="Apple SD Gothic Neo"/>
+              </a:rPr>
+              <a:t> — universal standard for AI ↔ tool connectivity</a:t>
+            </a:r>
+          </a:p>
+          <a:p>
+            <a:pPr>
+              <a:spcAft>
+                <a:spcPts val="400"/>
+              </a:spcAft>
+            </a:pPr>
+            <a:r>
+              <a:rPr b="0">
+                <a:ea typeface="Apple SD Gothic Neo"/>
+                <a:latin typeface="Apple SD Gothic Neo"/>
+              </a:rPr>
+              <a:t>Before: M models × N tools = custom code each (M×N)</a:t>
+            </a:r>
+          </a:p>
+          <a:p>
+            <a:pPr>
+              <a:spcAft>
+                <a:spcPts val="400"/>
+              </a:spcAft>
+            </a:pPr>
+            <a:r>
+              <a:rPr b="0">
+                <a:ea typeface="Apple SD Gothic Neo"/>
+                <a:latin typeface="Apple SD Gothic Neo"/>
+              </a:rPr>
+              <a:t>After: M models + N MCP servers = standard protocol (M+N)</a:t>
+            </a:r>
+          </a:p>
+          <a:p>
+            <a:pPr>
+              <a:spcAft>
+                <a:spcPts val="400"/>
+              </a:spcAft>
+            </a:pPr>
+            <a:r>
+              <a:rPr b="1">
+                <a:ea typeface="Apple SD Gothic Neo"/>
+                <a:latin typeface="Apple SD Gothic Neo"/>
+              </a:rPr>
+              <a:t>Scale:</a:t>
+            </a:r>
+            <a:r>
+              <a:rPr b="0">
+                <a:ea typeface="Apple SD Gothic Neo"/>
+                <a:latin typeface="Apple SD Gothic Neo"/>
+              </a:rPr>
+              <a:t> 5,800+ servers, 300+ clients, 97M SDK downloads/month</a:t>
+            </a:r>
+          </a:p>
+          <a:p>
+            <a:pPr>
+              <a:spcAft>
+                <a:spcPts val="400"/>
+              </a:spcAft>
+            </a:pPr>
+            <a:r>
+              <a:rPr b="1">
+                <a:ea typeface="Apple SD Gothic Neo"/>
+                <a:latin typeface="Apple SD Gothic Neo"/>
+              </a:rPr>
+              <a:t>But MCP is showing its age:</a:t>
+            </a:r>
+          </a:p>
+          <a:p>
+            <a:pPr>
+              <a:spcAft>
+                <a:spcPts val="400"/>
+              </a:spcAft>
+            </a:pPr>
+            <a:r>
+              <a:rPr b="0">
                 <a:ea typeface="Apple SD Gothic Neo"/>
                 <a:latin typeface="Apple SD Gothic Neo"/>
               </a:rPr>
@@ -4166,7 +4462,7 @@
               </a:spcAft>
             </a:pPr>
             <a:r>
-              <a:rPr>
+              <a:rPr b="0">
                 <a:ea typeface="Apple SD Gothic Neo"/>
                 <a:latin typeface="Apple SD Gothic Neo"/>
               </a:rPr>
@@ -4180,7 +4476,7 @@
               </a:spcAft>
             </a:pPr>
             <a:r>
-              <a:rPr>
+              <a:rPr b="0">
                 <a:ea typeface="Apple SD Gothic Neo"/>
                 <a:latin typeface="Apple SD Gothic Neo"/>
               </a:rPr>
@@ -4194,7 +4490,21 @@
               </a:spcAft>
             </a:pPr>
             <a:r>
-              <a:rPr>
+              <a:rPr b="1">
+                <a:ea typeface="Apple SD Gothic Neo"/>
+                <a:latin typeface="Apple SD Gothic Neo"/>
+              </a:rPr>
+              <a:t>Where MCP stands:</a:t>
+            </a:r>
+          </a:p>
+          <a:p>
+            <a:pPr>
+              <a:spcAft>
+                <a:spcPts val="400"/>
+              </a:spcAft>
+            </a:pPr>
+            <a:r>
+              <a:rPr b="0">
                 <a:ea typeface="Apple SD Gothic Neo"/>
                 <a:latin typeface="Apple SD Gothic Neo"/>
               </a:rPr>
@@ -4208,7 +4518,7 @@
               </a:spcAft>
             </a:pPr>
             <a:r>
-              <a:rPr>
+              <a:rPr b="0">
                 <a:ea typeface="Apple SD Gothic Neo"/>
                 <a:latin typeface="Apple SD Gothic Neo"/>
               </a:rPr>
@@ -4222,7 +4532,7 @@
               </a:spcAft>
             </a:pPr>
             <a:r>
-              <a:rPr>
+              <a:rPr b="0">
                 <a:ea typeface="Apple SD Gothic Neo"/>
                 <a:latin typeface="Apple SD Gothic Neo"/>
               </a:rPr>
@@ -4265,7 +4575,7 @@
           <a:lstStyle/>
           <a:p>
             <a:r>
-              <a:rPr>
+              <a:rPr b="0">
                 <a:ea typeface="Apple SD Gothic Neo"/>
                 <a:latin typeface="Apple SD Gothic Neo"/>
               </a:rPr>
@@ -4295,7 +4605,21 @@
               </a:spcAft>
             </a:pPr>
             <a:r>
-              <a:rPr>
+              <a:rPr b="1">
+                <a:ea typeface="Apple SD Gothic Neo"/>
+                <a:latin typeface="Apple SD Gothic Neo"/>
+              </a:rPr>
+              <a:t>Evolution of AI Coding Tools:</a:t>
+            </a:r>
+          </a:p>
+          <a:p>
+            <a:pPr>
+              <a:spcAft>
+                <a:spcPts val="400"/>
+              </a:spcAft>
+            </a:pPr>
+            <a:r>
+              <a:rPr b="0">
                 <a:ea typeface="Apple SD Gothic Neo"/>
                 <a:latin typeface="Apple SD Gothic Neo"/>
               </a:rPr>
@@ -4309,7 +4633,7 @@
               </a:spcAft>
             </a:pPr>
             <a:r>
-              <a:rPr>
+              <a:rPr b="0">
                 <a:ea typeface="Apple SD Gothic Neo"/>
                 <a:latin typeface="Apple SD Gothic Neo"/>
               </a:rPr>
@@ -4323,7 +4647,7 @@
               </a:spcAft>
             </a:pPr>
             <a:r>
-              <a:rPr>
+              <a:rPr b="0">
                 <a:ea typeface="Apple SD Gothic Neo"/>
                 <a:latin typeface="Apple SD Gothic Neo"/>
               </a:rPr>
@@ -4337,7 +4661,7 @@
               </a:spcAft>
             </a:pPr>
             <a:r>
-              <a:rPr>
+              <a:rPr b="0">
                 <a:ea typeface="Apple SD Gothic Neo"/>
                 <a:latin typeface="Apple SD Gothic Neo"/>
               </a:rPr>
@@ -4351,7 +4675,77 @@
               </a:spcAft>
             </a:pPr>
             <a:r>
-              <a:rPr>
+              <a:rPr b="1">
+                <a:ea typeface="Apple SD Gothic Neo"/>
+                <a:latin typeface="Apple SD Gothic Neo"/>
+              </a:rPr>
+              <a:t>Claude Code:</a:t>
+            </a:r>
+            <a:r>
+              <a:rPr b="0">
+                <a:ea typeface="Apple SD Gothic Neo"/>
+                <a:latin typeface="Apple SD Gothic Neo"/>
+              </a:rPr>
+              <a:t> #1 developer preference (46%) within 8 months of launch</a:t>
+            </a:r>
+          </a:p>
+          <a:p>
+            <a:pPr>
+              <a:spcAft>
+                <a:spcPts val="400"/>
+              </a:spcAft>
+            </a:pPr>
+            <a:r>
+              <a:rPr b="1">
+                <a:ea typeface="Apple SD Gothic Neo"/>
+                <a:latin typeface="Apple SD Gothic Neo"/>
+              </a:rPr>
+              <a:t>95%</a:t>
+            </a:r>
+            <a:r>
+              <a:rPr b="0">
+                <a:ea typeface="Apple SD Gothic Neo"/>
+                <a:latin typeface="Apple SD Gothic Neo"/>
+              </a:rPr>
+              <a:t> of developers use AI tools weekly; </a:t>
+            </a:r>
+            <a:r>
+              <a:rPr b="1">
+                <a:ea typeface="Apple SD Gothic Neo"/>
+                <a:latin typeface="Apple SD Gothic Neo"/>
+              </a:rPr>
+              <a:t>75%</a:t>
+            </a:r>
+            <a:r>
+              <a:rPr b="0">
+                <a:ea typeface="Apple SD Gothic Neo"/>
+                <a:latin typeface="Apple SD Gothic Neo"/>
+              </a:rPr>
+              <a:t> use AI for &gt;50% of coding</a:t>
+            </a:r>
+          </a:p>
+          <a:p>
+            <a:pPr>
+              <a:spcAft>
+                <a:spcPts val="400"/>
+              </a:spcAft>
+            </a:pPr>
+            <a:r>
+              <a:rPr b="1">
+                <a:ea typeface="Apple SD Gothic Neo"/>
+                <a:latin typeface="Apple SD Gothic Neo"/>
+              </a:rPr>
+              <a:t>Vibe Coding → Agentic Engineering:</a:t>
+            </a:r>
+          </a:p>
+          <a:p>
+            <a:pPr>
+              <a:spcAft>
+                <a:spcPts val="400"/>
+              </a:spcAft>
+            </a:pPr>
+            <a:r>
+              <a:rPr b="0">
                 <a:ea typeface="Apple SD Gothic Neo"/>
                 <a:latin typeface="Apple SD Gothic Neo"/>
               </a:rPr>
@@ -4365,7 +4759,7 @@
               </a:spcAft>
             </a:pPr>
             <a:r>
-              <a:rPr>
+              <a:rPr b="0">
                 <a:ea typeface="Apple SD Gothic Neo"/>
                 <a:latin typeface="Apple SD Gothic Neo"/>
               </a:rPr>
@@ -4379,7 +4773,7 @@
               </a:spcAft>
             </a:pPr>
             <a:r>
-              <a:rPr>
+              <a:rPr b="0">
                 <a:ea typeface="Apple SD Gothic Neo"/>
                 <a:latin typeface="Apple SD Gothic Neo"/>
               </a:rPr>
@@ -4422,7 +4816,7 @@
           <a:lstStyle/>
           <a:p>
             <a:r>
-              <a:rPr>
+              <a:rPr b="0">
                 <a:ea typeface="Apple SD Gothic Neo"/>
                 <a:latin typeface="Apple SD Gothic Neo"/>
               </a:rPr>
@@ -4445,7 +4839,15 @@
         <p:txBody>
           <a:bodyPr/>
           <a:lstStyle/>
-          <a:p/>
+          <a:p>
+            <a:r>
+              <a:rPr b="0">
+                <a:ea typeface="Apple SD Gothic Neo"/>
+                <a:latin typeface="Apple SD Gothic Neo"/>
+              </a:rPr>
+              <a:t/>
+            </a:r>
+          </a:p>
         </p:txBody>
       </p:sp>
       <p:sp>
@@ -4469,7 +4871,35 @@
               </a:spcAft>
             </a:pPr>
             <a:r>
-              <a:rPr>
+              <a:rPr b="1">
+                <a:ea typeface="Apple SD Gothic Neo"/>
+                <a:latin typeface="Apple SD Gothic Neo"/>
+              </a:rPr>
+              <a:t>Prompt Engineering vs Context Engineering:</a:t>
+            </a:r>
+          </a:p>
+          <a:p>
+            <a:pPr>
+              <a:spcAft>
+                <a:spcPts val="400"/>
+              </a:spcAft>
+            </a:pPr>
+            <a:r>
+              <a:rPr b="1">
+                <a:ea typeface="Apple SD Gothic Neo"/>
+                <a:latin typeface="Apple SD Gothic Neo"/>
+              </a:rPr>
+              <a:t>The 7 Elements of Context:</a:t>
+            </a:r>
+          </a:p>
+          <a:p>
+            <a:pPr>
+              <a:spcAft>
+                <a:spcPts val="400"/>
+              </a:spcAft>
+            </a:pPr>
+            <a:r>
+              <a:rPr b="0">
                 <a:ea typeface="Apple SD Gothic Neo"/>
                 <a:latin typeface="Apple SD Gothic Neo"/>
               </a:rPr>
@@ -4483,7 +4913,7 @@
               </a:spcAft>
             </a:pPr>
             <a:r>
-              <a:rPr>
+              <a:rPr b="0">
                 <a:ea typeface="Apple SD Gothic Neo"/>
                 <a:latin typeface="Apple SD Gothic Neo"/>
               </a:rPr>
@@ -4497,7 +4927,7 @@
               </a:spcAft>
             </a:pPr>
             <a:r>
-              <a:rPr>
+              <a:rPr b="0">
                 <a:ea typeface="Apple SD Gothic Neo"/>
                 <a:latin typeface="Apple SD Gothic Neo"/>
               </a:rPr>
@@ -4520,7 +4950,15 @@
         <p:txBody>
           <a:bodyPr/>
           <a:lstStyle/>
-          <a:p/>
+          <a:p>
+            <a:r>
+              <a:rPr b="0">
+                <a:ea typeface="Apple SD Gothic Neo"/>
+                <a:latin typeface="Apple SD Gothic Neo"/>
+              </a:rPr>
+              <a:t/>
+            </a:r>
+          </a:p>
         </p:txBody>
       </p:sp>
       <p:sp>
@@ -4544,7 +4982,7 @@
               </a:spcAft>
             </a:pPr>
             <a:r>
-              <a:rPr>
+              <a:rPr b="0">
                 <a:ea typeface="Apple SD Gothic Neo"/>
                 <a:latin typeface="Apple SD Gothic Neo"/>
               </a:rPr>
@@ -4558,7 +4996,7 @@
               </a:spcAft>
             </a:pPr>
             <a:r>
-              <a:rPr>
+              <a:rPr b="0">
                 <a:ea typeface="Apple SD Gothic Neo"/>
                 <a:latin typeface="Apple SD Gothic Neo"/>
               </a:rPr>
@@ -4572,7 +5010,7 @@
               </a:spcAft>
             </a:pPr>
             <a:r>
-              <a:rPr>
+              <a:rPr b="0">
                 <a:ea typeface="Apple SD Gothic Neo"/>
                 <a:latin typeface="Apple SD Gothic Neo"/>
               </a:rPr>
@@ -4586,11 +5024,25 @@
               </a:spcAft>
             </a:pPr>
             <a:r>
-              <a:rPr>
+              <a:rPr b="0">
                 <a:ea typeface="Apple SD Gothic Neo"/>
                 <a:latin typeface="Apple SD Gothic Neo"/>
               </a:rPr>
               <a:t>Output Format — Structured response definitions</a:t>
+            </a:r>
+          </a:p>
+          <a:p>
+            <a:pPr>
+              <a:spcAft>
+                <a:spcPts val="400"/>
+              </a:spcAft>
+            </a:pPr>
+            <a:r>
+              <a:rPr b="0">
+                <a:ea typeface="Apple SD Gothic Neo"/>
+                <a:latin typeface="Apple SD Gothic Neo"/>
+              </a:rPr>
+              <a:t>Context engineering designs *what* info, *when*, in *what format*, and *how much*.</a:t>
             </a:r>
           </a:p>
         </p:txBody>
@@ -4629,7 +5081,7 @@
           <a:lstStyle/>
           <a:p>
             <a:r>
-              <a:rPr>
+              <a:rPr b="0">
                 <a:ea typeface="Apple SD Gothic Neo"/>
                 <a:latin typeface="Apple SD Gothic Neo"/>
               </a:rPr>
@@ -4659,7 +5111,35 @@
               </a:spcAft>
             </a:pPr>
             <a:r>
-              <a:rPr>
+              <a:rPr b="1">
+                <a:ea typeface="Apple SD Gothic Neo"/>
+                <a:latin typeface="Apple SD Gothic Neo"/>
+              </a:rPr>
+              <a:t>Generative AI "answers" questions. Agentic AI "achieves" goals.</a:t>
+            </a:r>
+          </a:p>
+          <a:p>
+            <a:pPr>
+              <a:spcAft>
+                <a:spcPts val="400"/>
+              </a:spcAft>
+            </a:pPr>
+            <a:r>
+              <a:rPr b="1">
+                <a:ea typeface="Apple SD Gothic Neo"/>
+                <a:latin typeface="Apple SD Gothic Neo"/>
+              </a:rPr>
+              <a:t>Restaurant Analogy:</a:t>
+            </a:r>
+          </a:p>
+          <a:p>
+            <a:pPr>
+              <a:spcAft>
+                <a:spcPts val="400"/>
+              </a:spcAft>
+            </a:pPr>
+            <a:r>
+              <a:rPr b="0">
                 <a:ea typeface="Apple SD Gothic Neo"/>
                 <a:latin typeface="Apple SD Gothic Neo"/>
               </a:rPr>
@@ -4673,7 +5153,7 @@
               </a:spcAft>
             </a:pPr>
             <a:r>
-              <a:rPr>
+              <a:rPr b="0">
                 <a:ea typeface="Apple SD Gothic Neo"/>
                 <a:latin typeface="Apple SD Gothic Neo"/>
               </a:rPr>
@@ -4687,7 +5167,77 @@
               </a:spcAft>
             </a:pPr>
             <a:r>
-              <a:rPr>
+              <a:rPr b="1">
+                <a:ea typeface="Apple SD Gothic Neo"/>
+                <a:latin typeface="Apple SD Gothic Neo"/>
+              </a:rPr>
+              <a:t>The Agentic Loop:</a:t>
+            </a:r>
+            <a:r>
+              <a:rPr b="0">
+                <a:ea typeface="Apple SD Gothic Neo"/>
+                <a:latin typeface="Apple SD Gothic Neo"/>
+              </a:rPr>
+              <a:t> Receive Goal → Plan → Execute Tools → Evaluate → Iterate/Done</a:t>
+            </a:r>
+          </a:p>
+          <a:p>
+            <a:pPr>
+              <a:spcAft>
+                <a:spcPts val="400"/>
+              </a:spcAft>
+            </a:pPr>
+            <a:r>
+              <a:rPr b="0">
+                <a:ea typeface="Apple SD Gothic Neo"/>
+                <a:latin typeface="Apple SD Gothic Neo"/>
+              </a:rPr>
+              <a:t>Steps 2-5 are autonomous — no human intervention needed.</a:t>
+            </a:r>
+          </a:p>
+          <a:p>
+            <a:pPr>
+              <a:spcAft>
+                <a:spcPts val="400"/>
+              </a:spcAft>
+            </a:pPr>
+            <a:r>
+              <a:rPr b="1">
+                <a:ea typeface="Apple SD Gothic Neo"/>
+                <a:latin typeface="Apple SD Gothic Neo"/>
+              </a:rPr>
+              <a:t>Six Core Traits:</a:t>
+            </a:r>
+            <a:r>
+              <a:rPr b="0">
+                <a:ea typeface="Apple SD Gothic Neo"/>
+                <a:latin typeface="Apple SD Gothic Neo"/>
+              </a:rPr>
+              <a:t> Autonomy, Multi-step Reasoning, Tool Use, Memory, Adaptability, Goal Orientation</a:t>
+            </a:r>
+          </a:p>
+          <a:p>
+            <a:pPr>
+              <a:spcAft>
+                <a:spcPts val="400"/>
+              </a:spcAft>
+            </a:pPr>
+            <a:r>
+              <a:rPr b="1">
+                <a:ea typeface="Apple SD Gothic Neo"/>
+                <a:latin typeface="Apple SD Gothic Neo"/>
+              </a:rPr>
+              <a:t>AI Evolution:</a:t>
+            </a:r>
+          </a:p>
+          <a:p>
+            <a:pPr>
+              <a:spcAft>
+                <a:spcPts val="400"/>
+              </a:spcAft>
+            </a:pPr>
+            <a:r>
+              <a:rPr b="0">
                 <a:ea typeface="Apple SD Gothic Neo"/>
                 <a:latin typeface="Apple SD Gothic Neo"/>
               </a:rPr>
@@ -4701,7 +5251,7 @@
               </a:spcAft>
             </a:pPr>
             <a:r>
-              <a:rPr>
+              <a:rPr b="0">
                 <a:ea typeface="Apple SD Gothic Neo"/>
                 <a:latin typeface="Apple SD Gothic Neo"/>
               </a:rPr>
@@ -4715,7 +5265,7 @@
               </a:spcAft>
             </a:pPr>
             <a:r>
-              <a:rPr>
+              <a:rPr b="0">
                 <a:ea typeface="Apple SD Gothic Neo"/>
                 <a:latin typeface="Apple SD Gothic Neo"/>
               </a:rPr>
@@ -4729,7 +5279,7 @@
               </a:spcAft>
             </a:pPr>
             <a:r>
-              <a:rPr>
+              <a:rPr b="0">
                 <a:ea typeface="Apple SD Gothic Neo"/>
                 <a:latin typeface="Apple SD Gothic Neo"/>
               </a:rPr>
@@ -4743,11 +5293,60 @@
               </a:spcAft>
             </a:pPr>
             <a:r>
-              <a:rPr>
+              <a:rPr b="0">
                 <a:ea typeface="Apple SD Gothic Neo"/>
                 <a:latin typeface="Apple SD Gothic Neo"/>
               </a:rPr>
               <a:t>Gen 5: Multi-Agent Systems (2026, Agent Teams)</a:t>
+            </a:r>
+          </a:p>
+          <a:p>
+            <a:pPr>
+              <a:spcAft>
+                <a:spcPts val="400"/>
+              </a:spcAft>
+            </a:pPr>
+            <a:r>
+              <a:rPr b="1">
+                <a:ea typeface="Apple SD Gothic Neo"/>
+                <a:latin typeface="Apple SD Gothic Neo"/>
+              </a:rPr>
+              <a:t>Multi-Agent impact:</a:t>
+            </a:r>
+            <a:r>
+              <a:rPr b="0">
+                <a:ea typeface="Apple SD Gothic Neo"/>
+                <a:latin typeface="Apple SD Gothic Neo"/>
+              </a:rPr>
+              <a:t> Single agent = 1.7% actionable recommendations → Multi-agent = 100%</a:t>
+            </a:r>
+          </a:p>
+          <a:p>
+            <a:pPr>
+              <a:spcAft>
+                <a:spcPts val="400"/>
+              </a:spcAft>
+            </a:pPr>
+            <a:r>
+              <a:rPr b="0">
+                <a:ea typeface="Apple SD Gothic Neo"/>
+                <a:latin typeface="Apple SD Gothic Neo"/>
+              </a:rPr>
+              <a:t>Gartner: Multi-agent inquiries surged </a:t>
+            </a:r>
+            <a:r>
+              <a:rPr b="1">
+                <a:ea typeface="Apple SD Gothic Neo"/>
+                <a:latin typeface="Apple SD Gothic Neo"/>
+              </a:rPr>
+              <a:t>1,445%</a:t>
+            </a:r>
+            <a:r>
+              <a:rPr b="0">
+                <a:ea typeface="Apple SD Gothic Neo"/>
+                <a:latin typeface="Apple SD Gothic Neo"/>
+              </a:rPr>
+              <a:t>. Market: $7.8B → $52B+ by 2030.</a:t>
             </a:r>
           </a:p>
         </p:txBody>
@@ -4786,7 +5385,7 @@
           <a:lstStyle/>
           <a:p>
             <a:r>
-              <a:rPr>
+              <a:rPr b="0">
                 <a:ea typeface="Apple SD Gothic Neo"/>
                 <a:latin typeface="Apple SD Gothic Neo"/>
               </a:rPr>
@@ -4816,7 +5415,63 @@
               </a:spcAft>
             </a:pPr>
             <a:r>
-              <a:rPr>
+              <a:rPr b="1">
+                <a:ea typeface="Apple SD Gothic Neo"/>
+                <a:latin typeface="Apple SD Gothic Neo"/>
+              </a:rPr>
+              <a:t>What:</a:t>
+            </a:r>
+            <a:r>
+              <a:rPr b="0">
+                <a:ea typeface="Apple SD Gothic Neo"/>
+                <a:latin typeface="Apple SD Gothic Neo"/>
+              </a:rPr>
+              <a:t> Fair-code workflow automation (since 2019), 500+ integrations, self-hosted or cloud</a:t>
+            </a:r>
+          </a:p>
+          <a:p>
+            <a:pPr>
+              <a:spcAft>
+                <a:spcPts val="400"/>
+              </a:spcAft>
+            </a:pPr>
+            <a:r>
+              <a:rPr b="1">
+                <a:ea typeface="Apple SD Gothic Neo"/>
+                <a:latin typeface="Apple SD Gothic Neo"/>
+              </a:rPr>
+              <a:t>Scale:</a:t>
+            </a:r>
+            <a:r>
+              <a:rPr b="0">
+                <a:ea typeface="Apple SD Gothic Neo"/>
+                <a:latin typeface="Apple SD Gothic Neo"/>
+              </a:rPr>
+              <a:t> $2.5B valuation, Nvidia investment, 3,000+ enterprise customers, ARR $40M+</a:t>
+            </a:r>
+          </a:p>
+          <a:p>
+            <a:pPr>
+              <a:spcAft>
+                <a:spcPts val="400"/>
+              </a:spcAft>
+            </a:pPr>
+            <a:r>
+              <a:rPr b="1">
+                <a:ea typeface="Apple SD Gothic Neo"/>
+                <a:latin typeface="Apple SD Gothic Neo"/>
+              </a:rPr>
+              <a:t>Why n8n fits Agentic AI:</a:t>
+            </a:r>
+          </a:p>
+          <a:p>
+            <a:pPr>
+              <a:spcAft>
+                <a:spcPts val="400"/>
+              </a:spcAft>
+            </a:pPr>
+            <a:r>
+              <a:rPr b="0">
                 <a:ea typeface="Apple SD Gothic Neo"/>
                 <a:latin typeface="Apple SD Gothic Neo"/>
               </a:rPr>
@@ -4830,7 +5485,7 @@
               </a:spcAft>
             </a:pPr>
             <a:r>
-              <a:rPr>
+              <a:rPr b="0">
                 <a:ea typeface="Apple SD Gothic Neo"/>
                 <a:latin typeface="Apple SD Gothic Neo"/>
               </a:rPr>
@@ -4844,7 +5499,7 @@
               </a:spcAft>
             </a:pPr>
             <a:r>
-              <a:rPr>
+              <a:rPr b="0">
                 <a:ea typeface="Apple SD Gothic Neo"/>
                 <a:latin typeface="Apple SD Gothic Neo"/>
               </a:rPr>
@@ -4858,7 +5513,7 @@
               </a:spcAft>
             </a:pPr>
             <a:r>
-              <a:rPr>
+              <a:rPr b="0">
                 <a:ea typeface="Apple SD Gothic Neo"/>
                 <a:latin typeface="Apple SD Gothic Neo"/>
               </a:rPr>
@@ -4872,7 +5527,7 @@
               </a:spcAft>
             </a:pPr>
             <a:r>
-              <a:rPr>
+              <a:rPr b="0">
                 <a:ea typeface="Apple SD Gothic Neo"/>
                 <a:latin typeface="Apple SD Gothic Neo"/>
               </a:rPr>
@@ -4886,7 +5541,42 @@
               </a:spcAft>
             </a:pPr>
             <a:r>
-              <a:rPr>
+              <a:rPr b="1">
+                <a:ea typeface="Apple SD Gothic Neo"/>
+                <a:latin typeface="Apple SD Gothic Neo"/>
+              </a:rPr>
+              <a:t>Unique Position:</a:t>
+            </a:r>
+            <a:r>
+              <a:rPr b="0">
+                <a:ea typeface="Apple SD Gothic Neo"/>
+                <a:latin typeface="Apple SD Gothic Neo"/>
+              </a:rPr>
+              <a:t> Code flexibility + No-code speed = Sweet spot between LangGraph and Zapier</a:t>
+            </a:r>
+          </a:p>
+          <a:p>
+            <a:pPr>
+              <a:spcAft>
+                <a:spcPts val="400"/>
+              </a:spcAft>
+            </a:pPr>
+            <a:r>
+              <a:rPr b="1">
+                <a:ea typeface="Apple SD Gothic Neo"/>
+                <a:latin typeface="Apple SD Gothic Neo"/>
+              </a:rPr>
+              <a:t>Automotive Cases:</a:t>
+            </a:r>
+          </a:p>
+          <a:p>
+            <a:pPr>
+              <a:spcAft>
+                <a:spcPts val="400"/>
+              </a:spcAft>
+            </a:pPr>
+            <a:r>
+              <a:rPr b="0">
                 <a:ea typeface="Apple SD Gothic Neo"/>
                 <a:latin typeface="Apple SD Gothic Neo"/>
               </a:rPr>
@@ -4900,7 +5590,7 @@
               </a:spcAft>
             </a:pPr>
             <a:r>
-              <a:rPr>
+              <a:rPr b="0">
                 <a:ea typeface="Apple SD Gothic Neo"/>
                 <a:latin typeface="Apple SD Gothic Neo"/>
               </a:rPr>
@@ -4914,7 +5604,7 @@
               </a:spcAft>
             </a:pPr>
             <a:r>
-              <a:rPr>
+              <a:rPr b="0">
                 <a:ea typeface="Apple SD Gothic Neo"/>
                 <a:latin typeface="Apple SD Gothic Neo"/>
               </a:rPr>
@@ -4928,7 +5618,7 @@
               </a:spcAft>
             </a:pPr>
             <a:r>
-              <a:rPr>
+              <a:rPr b="0">
                 <a:ea typeface="Apple SD Gothic Neo"/>
                 <a:latin typeface="Apple SD Gothic Neo"/>
               </a:rPr>
@@ -4971,7 +5661,7 @@
           <a:lstStyle/>
           <a:p>
             <a:r>
-              <a:rPr>
+              <a:rPr b="0">
                 <a:ea typeface="Apple SD Gothic Neo"/>
                 <a:latin typeface="Apple SD Gothic Neo"/>
               </a:rPr>
@@ -4982,52 +5672,163 @@
       </p:sp>
       <p:sp>
         <p:nvSpPr>
-          <p:cNvPr id="3" name="Text Placeholder 2"/>
-          <p:cNvSpPr>
-            <a:spLocks noGrp="1"/>
-          </p:cNvSpPr>
-          <p:nvPr>
-            <p:ph type="body" idx="1"/>
-          </p:nvPr>
-        </p:nvSpPr>
-        <p:spPr/>
-        <p:txBody>
-          <a:bodyPr/>
-          <a:lstStyle/>
-          <a:p>
-            <a:r>
-              <a:rPr>
-                <a:ea typeface="Apple SD Gothic Neo"/>
-                <a:latin typeface="Apple SD Gothic Neo"/>
-              </a:rPr>
-              <a:t>• Week 1: Install n8n self-hosted, explore workflows</a:t>
-            </a:r>
-          </a:p>
-          <a:p>
-            <a:r>
-              <a:rPr>
-                <a:ea typeface="Apple SD Gothic Neo"/>
-                <a:latin typeface="Apple SD Gothic Neo"/>
-              </a:rPr>
-              <a:t>• Week 2: Build simple automation with AI Agent node</a:t>
-            </a:r>
-          </a:p>
-          <a:p>
-            <a:r>
-              <a:rPr>
-                <a:ea typeface="Apple SD Gothic Neo"/>
-                <a:latin typeface="Apple SD Gothic Neo"/>
-              </a:rPr>
-              <a:t>• Week 3: Convert one real business process to agentic workflow</a:t>
-            </a:r>
-          </a:p>
-          <a:p>
-            <a:r>
-              <a:rPr>
-                <a:ea typeface="Apple SD Gothic Neo"/>
-                <a:latin typeface="Apple SD Gothic Neo"/>
-              </a:rPr>
-              <a:t>• Week 4: Team review — Go / No-Go</a:t>
+          <p:cNvPr id="3" name="Content Placeholder 2"/>
+          <p:cNvSpPr>
+            <a:spLocks noGrp="1"/>
+          </p:cNvSpPr>
+          <p:nvPr>
+            <p:ph idx="1"/>
+          </p:nvPr>
+        </p:nvSpPr>
+        <p:spPr/>
+        <p:txBody>
+          <a:bodyPr/>
+          <a:lstStyle/>
+          <a:p>
+            <a:pPr>
+              <a:spcAft>
+                <a:spcPts val="400"/>
+              </a:spcAft>
+            </a:pPr>
+            <a:r>
+              <a:rPr b="1">
+                <a:ea typeface="Apple SD Gothic Neo"/>
+                <a:latin typeface="Apple SD Gothic Neo"/>
+              </a:rPr>
+              <a:t>The Big Picture:</a:t>
+            </a:r>
+          </a:p>
+          <a:p>
+            <a:pPr>
+              <a:spcAft>
+                <a:spcPts val="400"/>
+              </a:spcAft>
+            </a:pPr>
+            <a:r>
+              <a:rPr b="0">
+                <a:ea typeface="Apple SD Gothic Neo"/>
+                <a:latin typeface="Apple SD Gothic Neo"/>
+              </a:rPr>
+              <a:t>Models got smarter → Tools accessible → Code writes itself → Context managed → Agents work independently → Teams collaborate</a:t>
+            </a:r>
+          </a:p>
+          <a:p>
+            <a:pPr>
+              <a:spcAft>
+                <a:spcPts val="400"/>
+              </a:spcAft>
+            </a:pPr>
+            <a:r>
+              <a:rPr b="1">
+                <a:ea typeface="Apple SD Gothic Neo"/>
+                <a:latin typeface="Apple SD Gothic Neo"/>
+              </a:rPr>
+              <a:t>Why n8n:</a:t>
+            </a:r>
+            <a:r>
+              <a:rPr b="0">
+                <a:ea typeface="Apple SD Gothic Neo"/>
+                <a:latin typeface="Apple SD Gothic Neo"/>
+              </a:rPr>
+              <a:t> Low barrier, data sovereignty, 500+ connectors, bidirectional MCP, incremental adoption</a:t>
+            </a:r>
+          </a:p>
+          <a:p>
+            <a:pPr>
+              <a:spcAft>
+                <a:spcPts val="400"/>
+              </a:spcAft>
+            </a:pPr>
+            <a:r>
+              <a:rPr b="1">
+                <a:ea typeface="Apple SD Gothic Neo"/>
+                <a:latin typeface="Apple SD Gothic Neo"/>
+              </a:rPr>
+              <a:t>Proposed Next Steps:</a:t>
+            </a:r>
+          </a:p>
+          <a:p>
+            <a:pPr>
+              <a:spcAft>
+                <a:spcPts val="400"/>
+              </a:spcAft>
+            </a:pPr>
+            <a:r>
+              <a:rPr b="0">
+                <a:ea typeface="Apple SD Gothic Neo"/>
+                <a:latin typeface="Apple SD Gothic Neo"/>
+              </a:rPr>
+              <a:t>Week 1: Install n8n self-hosted, explore workflows</a:t>
+            </a:r>
+          </a:p>
+          <a:p>
+            <a:pPr>
+              <a:spcAft>
+                <a:spcPts val="400"/>
+              </a:spcAft>
+            </a:pPr>
+            <a:r>
+              <a:rPr b="0">
+                <a:ea typeface="Apple SD Gothic Neo"/>
+                <a:latin typeface="Apple SD Gothic Neo"/>
+              </a:rPr>
+              <a:t>Week 2: Build simple automation with AI Agent node</a:t>
+            </a:r>
+          </a:p>
+          <a:p>
+            <a:pPr>
+              <a:spcAft>
+                <a:spcPts val="400"/>
+              </a:spcAft>
+            </a:pPr>
+            <a:r>
+              <a:rPr b="0">
+                <a:ea typeface="Apple SD Gothic Neo"/>
+                <a:latin typeface="Apple SD Gothic Neo"/>
+              </a:rPr>
+              <a:t>Week 3: Convert one real business process to agentic workflow</a:t>
+            </a:r>
+          </a:p>
+          <a:p>
+            <a:pPr>
+              <a:spcAft>
+                <a:spcPts val="400"/>
+              </a:spcAft>
+            </a:pPr>
+            <a:r>
+              <a:rPr b="0">
+                <a:ea typeface="Apple SD Gothic Neo"/>
+                <a:latin typeface="Apple SD Gothic Neo"/>
+              </a:rPr>
+              <a:t>Week 4: Team review — Go / No-Go</a:t>
+            </a:r>
+          </a:p>
+          <a:p>
+            <a:pPr>
+              <a:spcAft>
+                <a:spcPts val="400"/>
+              </a:spcAft>
+            </a:pPr>
+            <a:r>
+              <a:rPr b="0">
+                <a:ea typeface="Apple SD Gothic Neo"/>
+                <a:latin typeface="Apple SD Gothic Neo"/>
+              </a:rPr>
+              <a:t>"The success of agentic AI depends not on the model, but on orchestration."</a:t>
+            </a:r>
+          </a:p>
+          <a:p>
+            <a:pPr>
+              <a:spcAft>
+                <a:spcPts val="400"/>
+              </a:spcAft>
+            </a:pPr>
+            <a:r>
+              <a:rPr b="0">
+                <a:ea typeface="Apple SD Gothic Neo"/>
+                <a:latin typeface="Apple SD Gothic Neo"/>
+              </a:rPr>
+              <a:t>The age of agentic AI has begun. n8n opens the door at the lowest threshold.</a:t>
             </a:r>
           </a:p>
         </p:txBody>
